--- a/Day 28/SAP Build Training Day 28.pptx
+++ b/Day 28/SAP Build Training Day 28.pptx
@@ -5,10 +5,10 @@
     <p:sldMasterId id="2147483648" r:id="rId1"/>
   </p:sldMasterIdLst>
   <p:notesMasterIdLst>
-    <p:notesMasterId r:id="rId13"/>
+    <p:notesMasterId r:id="rId16"/>
   </p:notesMasterIdLst>
   <p:handoutMasterIdLst>
-    <p:handoutMasterId r:id="rId14"/>
+    <p:handoutMasterId r:id="rId17"/>
   </p:handoutMasterIdLst>
   <p:sldIdLst>
     <p:sldId id="256" r:id="rId2"/>
@@ -16,12 +16,15 @@
     <p:sldId id="265" r:id="rId4"/>
     <p:sldId id="558" r:id="rId5"/>
     <p:sldId id="554" r:id="rId6"/>
-    <p:sldId id="555" r:id="rId7"/>
-    <p:sldId id="557" r:id="rId8"/>
-    <p:sldId id="537" r:id="rId9"/>
-    <p:sldId id="495" r:id="rId10"/>
-    <p:sldId id="496" r:id="rId11"/>
-    <p:sldId id="497" r:id="rId12"/>
+    <p:sldId id="592" r:id="rId7"/>
+    <p:sldId id="556" r:id="rId8"/>
+    <p:sldId id="555" r:id="rId9"/>
+    <p:sldId id="557" r:id="rId10"/>
+    <p:sldId id="559" r:id="rId11"/>
+    <p:sldId id="537" r:id="rId12"/>
+    <p:sldId id="495" r:id="rId13"/>
+    <p:sldId id="496" r:id="rId14"/>
+    <p:sldId id="497" r:id="rId15"/>
   </p:sldIdLst>
   <p:sldSz cx="9144000" cy="5143500" type="screen16x9"/>
   <p:notesSz cx="6858000" cy="9144000"/>
@@ -7409,7 +7412,7 @@
                 <a:tabLst/>
                 <a:defRPr/>
               </a:pPr>
-              <a:t>11</a:t>
+              <a:t>14</a:t>
             </a:fld>
             <a:endParaRPr kumimoji="0" lang="en-US" sz="1200" b="0" i="0" u="none" strike="noStrike" kern="1200" cap="none" spc="0" normalizeH="0" baseline="0" noProof="0">
               <a:ln>
@@ -11710,6 +11713,1605 @@
   <p:cSld>
     <p:spTree>
       <p:nvGrpSpPr>
+        <p:cNvPr id="1" name="">
+          <a:extLst>
+            <a:ext uri="{FF2B5EF4-FFF2-40B4-BE49-F238E27FC236}">
+              <a16:creationId xmlns:a16="http://schemas.microsoft.com/office/drawing/2014/main" id="{C109DA72-17E9-7838-114B-76BDF2BBE3A9}"/>
+            </a:ext>
+          </a:extLst>
+        </p:cNvPr>
+        <p:cNvGrpSpPr/>
+        <p:nvPr/>
+      </p:nvGrpSpPr>
+      <p:grpSpPr>
+        <a:xfrm>
+          <a:off x="0" y="0"/>
+          <a:ext cx="0" cy="0"/>
+          <a:chOff x="0" y="0"/>
+          <a:chExt cx="0" cy="0"/>
+        </a:xfrm>
+      </p:grpSpPr>
+      <p:sp>
+        <p:nvSpPr>
+          <p:cNvPr id="3" name="Footer Placeholder 2">
+            <a:extLst>
+              <a:ext uri="{FF2B5EF4-FFF2-40B4-BE49-F238E27FC236}">
+                <a16:creationId xmlns:a16="http://schemas.microsoft.com/office/drawing/2014/main" id="{820DE716-A206-F85D-8134-33411A3DAE08}"/>
+              </a:ext>
+            </a:extLst>
+          </p:cNvPr>
+          <p:cNvSpPr>
+            <a:spLocks noGrp="1"/>
+          </p:cNvSpPr>
+          <p:nvPr>
+            <p:ph type="ftr" sz="quarter" idx="11"/>
+          </p:nvPr>
+        </p:nvSpPr>
+        <p:spPr/>
+        <p:txBody>
+          <a:bodyPr/>
+          <a:lstStyle/>
+          <a:p>
+            <a:r>
+              <a:rPr lang="en-US" dirty="0"/>
+              <a:t>www.anubhavtrainings.com</a:t>
+            </a:r>
+          </a:p>
+        </p:txBody>
+      </p:sp>
+      <p:sp>
+        <p:nvSpPr>
+          <p:cNvPr id="4" name="Slide Number Placeholder 3">
+            <a:extLst>
+              <a:ext uri="{FF2B5EF4-FFF2-40B4-BE49-F238E27FC236}">
+                <a16:creationId xmlns:a16="http://schemas.microsoft.com/office/drawing/2014/main" id="{1F78ED1F-7F9A-0E87-F81D-6D29B80E43D1}"/>
+              </a:ext>
+            </a:extLst>
+          </p:cNvPr>
+          <p:cNvSpPr>
+            <a:spLocks noGrp="1"/>
+          </p:cNvSpPr>
+          <p:nvPr>
+            <p:ph type="sldNum" sz="quarter" idx="12"/>
+          </p:nvPr>
+        </p:nvSpPr>
+        <p:spPr>
+          <a:xfrm>
+            <a:off x="152400" y="4781550"/>
+            <a:ext cx="457200" cy="273844"/>
+          </a:xfrm>
+        </p:spPr>
+        <p:txBody>
+          <a:bodyPr/>
+          <a:lstStyle/>
+          <a:p>
+            <a:fld id="{B6F15528-21DE-4FAA-801E-634DDDAF4B2B}" type="slidenum">
+              <a:rPr lang="en-US" smtClean="0"/>
+              <a:pPr/>
+              <a:t>10</a:t>
+            </a:fld>
+            <a:endParaRPr lang="en-US" dirty="0"/>
+          </a:p>
+        </p:txBody>
+      </p:sp>
+      <p:sp>
+        <p:nvSpPr>
+          <p:cNvPr id="5" name="Title 4">
+            <a:extLst>
+              <a:ext uri="{FF2B5EF4-FFF2-40B4-BE49-F238E27FC236}">
+                <a16:creationId xmlns:a16="http://schemas.microsoft.com/office/drawing/2014/main" id="{DBC7FBCB-D409-858B-BBA3-0BFA98394655}"/>
+              </a:ext>
+            </a:extLst>
+          </p:cNvPr>
+          <p:cNvSpPr>
+            <a:spLocks noGrp="1"/>
+          </p:cNvSpPr>
+          <p:nvPr>
+            <p:ph type="title"/>
+          </p:nvPr>
+        </p:nvSpPr>
+        <p:spPr>
+          <a:xfrm>
+            <a:off x="76200" y="133350"/>
+            <a:ext cx="8229600" cy="533401"/>
+          </a:xfrm>
+        </p:spPr>
+        <p:txBody>
+          <a:bodyPr/>
+          <a:lstStyle/>
+          <a:p>
+            <a:endParaRPr lang="en-IN" sz="2500" dirty="0">
+              <a:latin typeface="Cooper Black" panose="0208090404030B020404" pitchFamily="18" charset="0"/>
+            </a:endParaRPr>
+          </a:p>
+        </p:txBody>
+      </p:sp>
+      <p:sp>
+        <p:nvSpPr>
+          <p:cNvPr id="2" name="TextBox 1">
+            <a:extLst>
+              <a:ext uri="{FF2B5EF4-FFF2-40B4-BE49-F238E27FC236}">
+                <a16:creationId xmlns:a16="http://schemas.microsoft.com/office/drawing/2014/main" id="{2EE8D5D3-DEED-A8E3-FB62-DDEA7567FEF6}"/>
+              </a:ext>
+            </a:extLst>
+          </p:cNvPr>
+          <p:cNvSpPr txBox="1"/>
+          <p:nvPr/>
+        </p:nvSpPr>
+        <p:spPr>
+          <a:xfrm>
+            <a:off x="152400" y="971549"/>
+            <a:ext cx="8839200" cy="4069557"/>
+          </a:xfrm>
+          <a:prstGeom prst="rect">
+            <a:avLst/>
+          </a:prstGeom>
+        </p:spPr>
+        <p:txBody>
+          <a:bodyPr vert="horz" lIns="91440" tIns="45720" rIns="91440" bIns="45720" rtlCol="0">
+            <a:normAutofit/>
+          </a:bodyPr>
+          <a:lstStyle/>
+          <a:p>
+            <a:pPr>
+              <a:spcBef>
+                <a:spcPct val="20000"/>
+              </a:spcBef>
+              <a:buFont typeface="Arial" pitchFamily="34" charset="0"/>
+            </a:pPr>
+            <a:r>
+              <a:rPr lang="en-US" sz="1400" b="0" i="0" dirty="0">
+                <a:effectLst/>
+              </a:rPr>
+              <a:t>console.log(</a:t>
+            </a:r>
+            <a:r>
+              <a:rPr lang="en-US" sz="1400" b="0" i="0" dirty="0" err="1">
+                <a:effectLst/>
+              </a:rPr>
+              <a:t>inputs.arrayOfObjects</a:t>
+            </a:r>
+            <a:r>
+              <a:rPr lang="en-US" sz="1400" b="0" i="0" dirty="0">
+                <a:effectLst/>
+              </a:rPr>
+              <a:t>);</a:t>
+            </a:r>
+          </a:p>
+          <a:p>
+            <a:pPr>
+              <a:spcBef>
+                <a:spcPct val="20000"/>
+              </a:spcBef>
+              <a:buFont typeface="Arial" pitchFamily="34" charset="0"/>
+            </a:pPr>
+            <a:endParaRPr lang="en-US" sz="1400" dirty="0"/>
+          </a:p>
+          <a:p>
+            <a:pPr>
+              <a:spcBef>
+                <a:spcPct val="20000"/>
+              </a:spcBef>
+              <a:buFont typeface="Arial" pitchFamily="34" charset="0"/>
+            </a:pPr>
+            <a:r>
+              <a:rPr lang="en-US" sz="1400" b="0" i="0" dirty="0">
+                <a:effectLst/>
+              </a:rPr>
+              <a:t>let </a:t>
+            </a:r>
+            <a:r>
+              <a:rPr lang="en-US" sz="1400" b="0" i="0" dirty="0" err="1">
+                <a:effectLst/>
+              </a:rPr>
+              <a:t>mainArray</a:t>
+            </a:r>
+            <a:r>
+              <a:rPr lang="en-US" sz="1400" b="0" i="0" dirty="0">
+                <a:effectLst/>
+              </a:rPr>
+              <a:t> = </a:t>
+            </a:r>
+            <a:r>
+              <a:rPr lang="en-US" sz="1400" b="0" i="0" dirty="0" err="1">
+                <a:effectLst/>
+              </a:rPr>
+              <a:t>inputs.arrayOfObjects</a:t>
+            </a:r>
+            <a:r>
+              <a:rPr lang="en-US" sz="1400" b="0" i="0" dirty="0">
+                <a:effectLst/>
+              </a:rPr>
+              <a:t>;</a:t>
+            </a:r>
+          </a:p>
+          <a:p>
+            <a:pPr>
+              <a:spcBef>
+                <a:spcPct val="20000"/>
+              </a:spcBef>
+              <a:buFont typeface="Arial" pitchFamily="34" charset="0"/>
+            </a:pPr>
+            <a:endParaRPr lang="en-US" sz="1400" dirty="0"/>
+          </a:p>
+          <a:p>
+            <a:pPr>
+              <a:spcBef>
+                <a:spcPct val="20000"/>
+              </a:spcBef>
+              <a:buFont typeface="Arial" pitchFamily="34" charset="0"/>
+            </a:pPr>
+            <a:r>
+              <a:rPr lang="en-US" sz="1400" b="0" i="0" dirty="0">
+                <a:effectLst/>
+              </a:rPr>
+              <a:t>//Step 1: Extract the courses data from each basket</a:t>
+            </a:r>
+          </a:p>
+          <a:p>
+            <a:pPr>
+              <a:spcBef>
+                <a:spcPct val="20000"/>
+              </a:spcBef>
+              <a:buFont typeface="Arial" pitchFamily="34" charset="0"/>
+            </a:pPr>
+            <a:r>
+              <a:rPr lang="en-US" sz="1400" b="0" i="0" dirty="0">
+                <a:effectLst/>
+              </a:rPr>
+              <a:t>const </a:t>
+            </a:r>
+            <a:r>
+              <a:rPr lang="en-US" sz="1400" b="0" i="0" dirty="0" err="1">
+                <a:effectLst/>
+              </a:rPr>
+              <a:t>allCourses</a:t>
+            </a:r>
+            <a:r>
+              <a:rPr lang="en-US" sz="1400" b="0" i="0" dirty="0">
+                <a:effectLst/>
+              </a:rPr>
+              <a:t> = </a:t>
+            </a:r>
+            <a:r>
+              <a:rPr lang="en-US" sz="1400" b="0" i="0" dirty="0" err="1">
+                <a:effectLst/>
+              </a:rPr>
+              <a:t>mainArray.flatMap</a:t>
+            </a:r>
+            <a:r>
+              <a:rPr lang="en-US" sz="1400" b="0" i="0" dirty="0">
+                <a:effectLst/>
+              </a:rPr>
+              <a:t>(item =&gt; </a:t>
+            </a:r>
+            <a:r>
+              <a:rPr lang="en-US" sz="1400" b="0" i="0" dirty="0" err="1">
+                <a:effectLst/>
+              </a:rPr>
+              <a:t>item.courses</a:t>
+            </a:r>
+            <a:r>
+              <a:rPr lang="en-US" sz="1400" b="0" i="0" dirty="0">
+                <a:effectLst/>
+              </a:rPr>
+              <a:t>);</a:t>
+            </a:r>
+          </a:p>
+          <a:p>
+            <a:pPr>
+              <a:spcBef>
+                <a:spcPct val="20000"/>
+              </a:spcBef>
+              <a:buFont typeface="Arial" pitchFamily="34" charset="0"/>
+            </a:pPr>
+            <a:endParaRPr lang="en-US" sz="1400" dirty="0"/>
+          </a:p>
+          <a:p>
+            <a:pPr>
+              <a:spcBef>
+                <a:spcPct val="20000"/>
+              </a:spcBef>
+              <a:buFont typeface="Arial" pitchFamily="34" charset="0"/>
+            </a:pPr>
+            <a:r>
+              <a:rPr lang="en-US" sz="1400" b="0" i="0" dirty="0">
+                <a:effectLst/>
+              </a:rPr>
+              <a:t>//Step 2: Process the batch of JSONs convert it to a array of strings  </a:t>
+            </a:r>
+          </a:p>
+          <a:p>
+            <a:pPr>
+              <a:spcBef>
+                <a:spcPct val="20000"/>
+              </a:spcBef>
+              <a:buFont typeface="Arial" pitchFamily="34" charset="0"/>
+            </a:pPr>
+            <a:r>
+              <a:rPr lang="en-US" sz="1400" b="0" i="0" dirty="0">
+                <a:effectLst/>
+              </a:rPr>
+              <a:t>const </a:t>
+            </a:r>
+            <a:r>
+              <a:rPr lang="en-US" sz="1400" b="0" i="0" dirty="0" err="1">
+                <a:effectLst/>
+              </a:rPr>
+              <a:t>arrOfString</a:t>
+            </a:r>
+            <a:r>
+              <a:rPr lang="en-US" sz="1400" b="0" i="0" dirty="0">
+                <a:effectLst/>
+              </a:rPr>
+              <a:t> = </a:t>
+            </a:r>
+            <a:r>
+              <a:rPr lang="en-US" sz="1400" b="0" i="0" dirty="0" err="1">
+                <a:effectLst/>
+              </a:rPr>
+              <a:t>allCourses.map</a:t>
+            </a:r>
+            <a:r>
+              <a:rPr lang="en-US" sz="1400" b="0" i="0" dirty="0">
+                <a:effectLst/>
+              </a:rPr>
+              <a:t>(item =&gt; </a:t>
+            </a:r>
+            <a:r>
+              <a:rPr lang="en-US" sz="1400" b="0" i="0" dirty="0" err="1">
+                <a:effectLst/>
+              </a:rPr>
+              <a:t>JSON.stringify</a:t>
+            </a:r>
+            <a:r>
+              <a:rPr lang="en-US" sz="1400" b="0" i="0" dirty="0">
+                <a:effectLst/>
+              </a:rPr>
+              <a:t>(item));</a:t>
+            </a:r>
+          </a:p>
+          <a:p>
+            <a:pPr>
+              <a:spcBef>
+                <a:spcPct val="20000"/>
+              </a:spcBef>
+              <a:buFont typeface="Arial" pitchFamily="34" charset="0"/>
+            </a:pPr>
+            <a:endParaRPr lang="en-US" sz="1400" dirty="0"/>
+          </a:p>
+          <a:p>
+            <a:pPr>
+              <a:spcBef>
+                <a:spcPct val="20000"/>
+              </a:spcBef>
+              <a:buFont typeface="Arial" pitchFamily="34" charset="0"/>
+            </a:pPr>
+            <a:r>
+              <a:rPr lang="en-US" sz="1400" b="0" i="0" dirty="0">
+                <a:effectLst/>
+              </a:rPr>
+              <a:t>//Step 3: Send it out which later can be saved in cloud store</a:t>
+            </a:r>
+          </a:p>
+          <a:p>
+            <a:pPr>
+              <a:spcBef>
+                <a:spcPct val="20000"/>
+              </a:spcBef>
+              <a:buFont typeface="Arial" pitchFamily="34" charset="0"/>
+            </a:pPr>
+            <a:r>
+              <a:rPr lang="en-US" sz="1400" b="0" i="0" dirty="0">
+                <a:effectLst/>
+              </a:rPr>
+              <a:t>return { result: </a:t>
+            </a:r>
+            <a:r>
+              <a:rPr lang="en-US" sz="1400" b="0" i="0" dirty="0" err="1">
+                <a:effectLst/>
+              </a:rPr>
+              <a:t>arrOfString</a:t>
+            </a:r>
+            <a:r>
+              <a:rPr lang="en-US" sz="1400" b="0" i="0" dirty="0">
+                <a:effectLst/>
+              </a:rPr>
+              <a:t> };</a:t>
+            </a:r>
+            <a:endParaRPr lang="en-US" sz="1400" dirty="0"/>
+          </a:p>
+        </p:txBody>
+      </p:sp>
+    </p:spTree>
+    <p:extLst>
+      <p:ext uri="{BB962C8B-B14F-4D97-AF65-F5344CB8AC3E}">
+        <p14:creationId xmlns:p14="http://schemas.microsoft.com/office/powerpoint/2010/main" val="4012697996"/>
+      </p:ext>
+    </p:extLst>
+  </p:cSld>
+  <p:clrMapOvr>
+    <a:masterClrMapping/>
+  </p:clrMapOvr>
+  <mc:AlternateContent xmlns:mc="http://schemas.openxmlformats.org/markup-compatibility/2006" xmlns:p14="http://schemas.microsoft.com/office/powerpoint/2010/main">
+    <mc:Choice Requires="p14">
+      <p:transition spd="med" p14:dur="700">
+        <p:fade/>
+      </p:transition>
+    </mc:Choice>
+    <mc:Fallback xmlns="">
+      <p:transition spd="med">
+        <p:fade/>
+      </p:transition>
+    </mc:Fallback>
+  </mc:AlternateContent>
+</p:sld>
+</file>
+
+<file path=ppt/slides/slide11.xml><?xml version="1.0" encoding="utf-8"?>
+<p:sld xmlns:a="http://schemas.openxmlformats.org/drawingml/2006/main" xmlns:r="http://schemas.openxmlformats.org/officeDocument/2006/relationships" xmlns:p="http://schemas.openxmlformats.org/presentationml/2006/main">
+  <p:cSld>
+    <p:spTree>
+      <p:nvGrpSpPr>
+        <p:cNvPr id="1" name=""/>
+        <p:cNvGrpSpPr/>
+        <p:nvPr/>
+      </p:nvGrpSpPr>
+      <p:grpSpPr>
+        <a:xfrm>
+          <a:off x="0" y="0"/>
+          <a:ext cx="0" cy="0"/>
+          <a:chOff x="0" y="0"/>
+          <a:chExt cx="0" cy="0"/>
+        </a:xfrm>
+      </p:grpSpPr>
+      <p:sp>
+        <p:nvSpPr>
+          <p:cNvPr id="2" name="Footer Placeholder 1">
+            <a:extLst>
+              <a:ext uri="{FF2B5EF4-FFF2-40B4-BE49-F238E27FC236}">
+                <a16:creationId xmlns:a16="http://schemas.microsoft.com/office/drawing/2014/main" id="{515D2C93-0120-CCFC-9609-5065A85D5191}"/>
+              </a:ext>
+            </a:extLst>
+          </p:cNvPr>
+          <p:cNvSpPr>
+            <a:spLocks noGrp="1"/>
+          </p:cNvSpPr>
+          <p:nvPr>
+            <p:ph type="ftr" sz="quarter" idx="11"/>
+          </p:nvPr>
+        </p:nvSpPr>
+        <p:spPr/>
+        <p:txBody>
+          <a:bodyPr/>
+          <a:lstStyle/>
+          <a:p>
+            <a:r>
+              <a:rPr lang="en-US"/>
+              <a:t>www.anubhavtrainings.com</a:t>
+            </a:r>
+            <a:endParaRPr lang="en-US" dirty="0"/>
+          </a:p>
+        </p:txBody>
+      </p:sp>
+      <p:sp>
+        <p:nvSpPr>
+          <p:cNvPr id="3" name="Slide Number Placeholder 2">
+            <a:extLst>
+              <a:ext uri="{FF2B5EF4-FFF2-40B4-BE49-F238E27FC236}">
+                <a16:creationId xmlns:a16="http://schemas.microsoft.com/office/drawing/2014/main" id="{8C7B24C2-E0A7-CEBF-F7A8-383001851AF8}"/>
+              </a:ext>
+            </a:extLst>
+          </p:cNvPr>
+          <p:cNvSpPr>
+            <a:spLocks noGrp="1"/>
+          </p:cNvSpPr>
+          <p:nvPr>
+            <p:ph type="sldNum" sz="quarter" idx="12"/>
+          </p:nvPr>
+        </p:nvSpPr>
+        <p:spPr/>
+        <p:txBody>
+          <a:bodyPr/>
+          <a:lstStyle/>
+          <a:p>
+            <a:fld id="{B6F15528-21DE-4FAA-801E-634DDDAF4B2B}" type="slidenum">
+              <a:rPr lang="en-US" smtClean="0"/>
+              <a:pPr/>
+              <a:t>11</a:t>
+            </a:fld>
+            <a:endParaRPr lang="en-US"/>
+          </a:p>
+        </p:txBody>
+      </p:sp>
+      <p:sp>
+        <p:nvSpPr>
+          <p:cNvPr id="4" name="Title 3">
+            <a:extLst>
+              <a:ext uri="{FF2B5EF4-FFF2-40B4-BE49-F238E27FC236}">
+                <a16:creationId xmlns:a16="http://schemas.microsoft.com/office/drawing/2014/main" id="{3926B177-165E-9165-72C4-FD0C520A2E18}"/>
+              </a:ext>
+            </a:extLst>
+          </p:cNvPr>
+          <p:cNvSpPr>
+            <a:spLocks noGrp="1"/>
+          </p:cNvSpPr>
+          <p:nvPr>
+            <p:ph type="title"/>
+          </p:nvPr>
+        </p:nvSpPr>
+        <p:spPr/>
+        <p:txBody>
+          <a:bodyPr/>
+          <a:lstStyle/>
+          <a:p>
+            <a:endParaRPr lang="en-IN"/>
+          </a:p>
+        </p:txBody>
+      </p:sp>
+      <mc:AlternateContent xmlns:mc="http://schemas.openxmlformats.org/markup-compatibility/2006" xmlns:p14="http://schemas.microsoft.com/office/powerpoint/2010/main">
+        <mc:Choice Requires="p14">
+          <p:contentPart p14:bwMode="auto" r:id="rId2">
+            <p14:nvContentPartPr>
+              <p14:cNvPr id="5" name="Ink 4">
+                <a:extLst>
+                  <a:ext uri="{FF2B5EF4-FFF2-40B4-BE49-F238E27FC236}">
+                    <a16:creationId xmlns:a16="http://schemas.microsoft.com/office/drawing/2014/main" id="{AB080056-AF3B-2DD1-1233-CD37BCC6426B}"/>
+                  </a:ext>
+                </a:extLst>
+              </p14:cNvPr>
+              <p14:cNvContentPartPr/>
+              <p14:nvPr/>
+            </p14:nvContentPartPr>
+            <p14:xfrm>
+              <a:off x="1315357" y="-14658"/>
+              <a:ext cx="360" cy="360"/>
+            </p14:xfrm>
+          </p:contentPart>
+        </mc:Choice>
+        <mc:Fallback xmlns="">
+          <p:pic>
+            <p:nvPicPr>
+              <p:cNvPr id="5" name="Ink 4">
+                <a:extLst>
+                  <a:ext uri="{FF2B5EF4-FFF2-40B4-BE49-F238E27FC236}">
+                    <a16:creationId xmlns:a16="http://schemas.microsoft.com/office/drawing/2014/main" id="{AB080056-AF3B-2DD1-1233-CD37BCC6426B}"/>
+                  </a:ext>
+                </a:extLst>
+              </p:cNvPr>
+              <p:cNvPicPr/>
+              <p:nvPr/>
+            </p:nvPicPr>
+            <p:blipFill>
+              <a:blip r:embed="rId3"/>
+              <a:stretch>
+                <a:fillRect/>
+              </a:stretch>
+            </p:blipFill>
+            <p:spPr>
+              <a:xfrm>
+                <a:off x="1306357" y="-23658"/>
+                <a:ext cx="18000" cy="18000"/>
+              </a:xfrm>
+              <a:prstGeom prst="rect">
+                <a:avLst/>
+              </a:prstGeom>
+            </p:spPr>
+          </p:pic>
+        </mc:Fallback>
+      </mc:AlternateContent>
+    </p:spTree>
+    <p:extLst>
+      <p:ext uri="{BB962C8B-B14F-4D97-AF65-F5344CB8AC3E}">
+        <p14:creationId xmlns:p14="http://schemas.microsoft.com/office/powerpoint/2010/main" val="720877012"/>
+      </p:ext>
+    </p:extLst>
+  </p:cSld>
+  <p:clrMapOvr>
+    <a:masterClrMapping/>
+  </p:clrMapOvr>
+</p:sld>
+</file>
+
+<file path=ppt/slides/slide12.xml><?xml version="1.0" encoding="utf-8"?>
+<p:sld xmlns:a="http://schemas.openxmlformats.org/drawingml/2006/main" xmlns:r="http://schemas.openxmlformats.org/officeDocument/2006/relationships" xmlns:p="http://schemas.openxmlformats.org/presentationml/2006/main">
+  <p:cSld>
+    <p:spTree>
+      <p:nvGrpSpPr>
+        <p:cNvPr id="1" name=""/>
+        <p:cNvGrpSpPr/>
+        <p:nvPr/>
+      </p:nvGrpSpPr>
+      <p:grpSpPr>
+        <a:xfrm>
+          <a:off x="0" y="0"/>
+          <a:ext cx="0" cy="0"/>
+          <a:chOff x="0" y="0"/>
+          <a:chExt cx="0" cy="0"/>
+        </a:xfrm>
+      </p:grpSpPr>
+      <p:sp>
+        <p:nvSpPr>
+          <p:cNvPr id="5" name="Flowchart: Connector 4"/>
+          <p:cNvSpPr/>
+          <p:nvPr/>
+        </p:nvSpPr>
+        <p:spPr>
+          <a:xfrm>
+            <a:off x="4355976" y="21622"/>
+            <a:ext cx="4168026" cy="4101362"/>
+          </a:xfrm>
+          <a:prstGeom prst="flowChartConnector">
+            <a:avLst/>
+          </a:prstGeom>
+          <a:gradFill flip="none" rotWithShape="1">
+            <a:gsLst>
+              <a:gs pos="0">
+                <a:srgbClr val="55E96E"/>
+              </a:gs>
+              <a:gs pos="46000">
+                <a:srgbClr val="0AEC25"/>
+              </a:gs>
+              <a:gs pos="100000">
+                <a:srgbClr val="00B050"/>
+              </a:gs>
+            </a:gsLst>
+            <a:path path="circle">
+              <a:fillToRect l="50000" t="130000" r="50000" b="-30000"/>
+            </a:path>
+            <a:tileRect/>
+          </a:gradFill>
+          <a:ln>
+            <a:noFill/>
+          </a:ln>
+        </p:spPr>
+        <p:style>
+          <a:lnRef idx="2">
+            <a:schemeClr val="accent1">
+              <a:shade val="50000"/>
+            </a:schemeClr>
+          </a:lnRef>
+          <a:fillRef idx="1">
+            <a:schemeClr val="accent1"/>
+          </a:fillRef>
+          <a:effectRef idx="0">
+            <a:schemeClr val="accent1"/>
+          </a:effectRef>
+          <a:fontRef idx="minor">
+            <a:schemeClr val="lt1"/>
+          </a:fontRef>
+        </p:style>
+        <p:txBody>
+          <a:bodyPr rtlCol="0" anchor="ctr"/>
+          <a:lstStyle/>
+          <a:p>
+            <a:pPr algn="ctr"/>
+            <a:endParaRPr lang="en-US" sz="1350"/>
+          </a:p>
+        </p:txBody>
+      </p:sp>
+      <p:pic>
+        <p:nvPicPr>
+          <p:cNvPr id="6" name="Picture Placeholder 11">
+            <a:extLst>
+              <a:ext uri="{FF2B5EF4-FFF2-40B4-BE49-F238E27FC236}">
+                <a16:creationId xmlns:a16="http://schemas.microsoft.com/office/drawing/2014/main" id="{420F5850-2D59-4C25-ADFF-E9013C5A6AAE}"/>
+              </a:ext>
+            </a:extLst>
+          </p:cNvPr>
+          <p:cNvPicPr>
+            <a:picLocks noChangeAspect="1"/>
+          </p:cNvPicPr>
+          <p:nvPr/>
+        </p:nvPicPr>
+        <p:blipFill>
+          <a:blip r:embed="rId2">
+            <a:extLst>
+              <a:ext uri="{28A0092B-C50C-407E-A947-70E740481C1C}">
+                <a14:useLocalDpi xmlns:a14="http://schemas.microsoft.com/office/drawing/2010/main" val="0"/>
+              </a:ext>
+            </a:extLst>
+          </a:blip>
+          <a:stretch>
+            <a:fillRect/>
+          </a:stretch>
+        </p:blipFill>
+        <p:spPr>
+          <a:xfrm>
+            <a:off x="22649" y="10551"/>
+            <a:ext cx="5088657" cy="4690760"/>
+          </a:xfrm>
+          <a:custGeom>
+            <a:avLst/>
+            <a:gdLst>
+              <a:gd name="connsiteX0" fmla="*/ 0 w 7654699"/>
+              <a:gd name="connsiteY0" fmla="*/ 0 h 5678805"/>
+              <a:gd name="connsiteX1" fmla="*/ 7654699 w 7654699"/>
+              <a:gd name="connsiteY1" fmla="*/ 0 h 5678805"/>
+              <a:gd name="connsiteX2" fmla="*/ 7654699 w 7654699"/>
+              <a:gd name="connsiteY2" fmla="*/ 0 h 5678805"/>
+              <a:gd name="connsiteX3" fmla="*/ 7654699 w 7654699"/>
+              <a:gd name="connsiteY3" fmla="*/ 4808982 h 5678805"/>
+              <a:gd name="connsiteX4" fmla="*/ 6784876 w 7654699"/>
+              <a:gd name="connsiteY4" fmla="*/ 5678805 h 5678805"/>
+              <a:gd name="connsiteX5" fmla="*/ 869823 w 7654699"/>
+              <a:gd name="connsiteY5" fmla="*/ 5678805 h 5678805"/>
+              <a:gd name="connsiteX6" fmla="*/ 0 w 7654699"/>
+              <a:gd name="connsiteY6" fmla="*/ 4808982 h 5678805"/>
+              <a:gd name="connsiteX7" fmla="*/ 0 w 7654699"/>
+              <a:gd name="connsiteY7" fmla="*/ 0 h 5678805"/>
+              <a:gd name="connsiteX8" fmla="*/ 0 w 7654699"/>
+              <a:gd name="connsiteY8" fmla="*/ 0 h 5678805"/>
+              <a:gd name="connsiteX0" fmla="*/ 0 w 7654699"/>
+              <a:gd name="connsiteY0" fmla="*/ 6717 h 5685522"/>
+              <a:gd name="connsiteX1" fmla="*/ 901515 w 7654699"/>
+              <a:gd name="connsiteY1" fmla="*/ 0 h 5685522"/>
+              <a:gd name="connsiteX2" fmla="*/ 7654699 w 7654699"/>
+              <a:gd name="connsiteY2" fmla="*/ 6717 h 5685522"/>
+              <a:gd name="connsiteX3" fmla="*/ 7654699 w 7654699"/>
+              <a:gd name="connsiteY3" fmla="*/ 6717 h 5685522"/>
+              <a:gd name="connsiteX4" fmla="*/ 7654699 w 7654699"/>
+              <a:gd name="connsiteY4" fmla="*/ 4815699 h 5685522"/>
+              <a:gd name="connsiteX5" fmla="*/ 6784876 w 7654699"/>
+              <a:gd name="connsiteY5" fmla="*/ 5685522 h 5685522"/>
+              <a:gd name="connsiteX6" fmla="*/ 869823 w 7654699"/>
+              <a:gd name="connsiteY6" fmla="*/ 5685522 h 5685522"/>
+              <a:gd name="connsiteX7" fmla="*/ 0 w 7654699"/>
+              <a:gd name="connsiteY7" fmla="*/ 4815699 h 5685522"/>
+              <a:gd name="connsiteX8" fmla="*/ 0 w 7654699"/>
+              <a:gd name="connsiteY8" fmla="*/ 6717 h 5685522"/>
+              <a:gd name="connsiteX9" fmla="*/ 0 w 7654699"/>
+              <a:gd name="connsiteY9" fmla="*/ 6717 h 5685522"/>
+              <a:gd name="connsiteX0" fmla="*/ 0 w 7654699"/>
+              <a:gd name="connsiteY0" fmla="*/ 6717 h 5685522"/>
+              <a:gd name="connsiteX1" fmla="*/ 901515 w 7654699"/>
+              <a:gd name="connsiteY1" fmla="*/ 0 h 5685522"/>
+              <a:gd name="connsiteX2" fmla="*/ 7654699 w 7654699"/>
+              <a:gd name="connsiteY2" fmla="*/ 6717 h 5685522"/>
+              <a:gd name="connsiteX3" fmla="*/ 7654699 w 7654699"/>
+              <a:gd name="connsiteY3" fmla="*/ 6717 h 5685522"/>
+              <a:gd name="connsiteX4" fmla="*/ 7654699 w 7654699"/>
+              <a:gd name="connsiteY4" fmla="*/ 4815699 h 5685522"/>
+              <a:gd name="connsiteX5" fmla="*/ 6784876 w 7654699"/>
+              <a:gd name="connsiteY5" fmla="*/ 5685522 h 5685522"/>
+              <a:gd name="connsiteX6" fmla="*/ 869823 w 7654699"/>
+              <a:gd name="connsiteY6" fmla="*/ 5685522 h 5685522"/>
+              <a:gd name="connsiteX7" fmla="*/ 0 w 7654699"/>
+              <a:gd name="connsiteY7" fmla="*/ 4815699 h 5685522"/>
+              <a:gd name="connsiteX8" fmla="*/ 0 w 7654699"/>
+              <a:gd name="connsiteY8" fmla="*/ 6717 h 5685522"/>
+              <a:gd name="connsiteX0" fmla="*/ 0 w 7654699"/>
+              <a:gd name="connsiteY0" fmla="*/ 4815699 h 5685522"/>
+              <a:gd name="connsiteX1" fmla="*/ 901515 w 7654699"/>
+              <a:gd name="connsiteY1" fmla="*/ 0 h 5685522"/>
+              <a:gd name="connsiteX2" fmla="*/ 7654699 w 7654699"/>
+              <a:gd name="connsiteY2" fmla="*/ 6717 h 5685522"/>
+              <a:gd name="connsiteX3" fmla="*/ 7654699 w 7654699"/>
+              <a:gd name="connsiteY3" fmla="*/ 6717 h 5685522"/>
+              <a:gd name="connsiteX4" fmla="*/ 7654699 w 7654699"/>
+              <a:gd name="connsiteY4" fmla="*/ 4815699 h 5685522"/>
+              <a:gd name="connsiteX5" fmla="*/ 6784876 w 7654699"/>
+              <a:gd name="connsiteY5" fmla="*/ 5685522 h 5685522"/>
+              <a:gd name="connsiteX6" fmla="*/ 869823 w 7654699"/>
+              <a:gd name="connsiteY6" fmla="*/ 5685522 h 5685522"/>
+              <a:gd name="connsiteX7" fmla="*/ 0 w 7654699"/>
+              <a:gd name="connsiteY7" fmla="*/ 4815699 h 5685522"/>
+              <a:gd name="connsiteX0" fmla="*/ 776254 w 7561130"/>
+              <a:gd name="connsiteY0" fmla="*/ 5685522 h 5685522"/>
+              <a:gd name="connsiteX1" fmla="*/ 807946 w 7561130"/>
+              <a:gd name="connsiteY1" fmla="*/ 0 h 5685522"/>
+              <a:gd name="connsiteX2" fmla="*/ 7561130 w 7561130"/>
+              <a:gd name="connsiteY2" fmla="*/ 6717 h 5685522"/>
+              <a:gd name="connsiteX3" fmla="*/ 7561130 w 7561130"/>
+              <a:gd name="connsiteY3" fmla="*/ 6717 h 5685522"/>
+              <a:gd name="connsiteX4" fmla="*/ 7561130 w 7561130"/>
+              <a:gd name="connsiteY4" fmla="*/ 4815699 h 5685522"/>
+              <a:gd name="connsiteX5" fmla="*/ 6691307 w 7561130"/>
+              <a:gd name="connsiteY5" fmla="*/ 5685522 h 5685522"/>
+              <a:gd name="connsiteX6" fmla="*/ 776254 w 7561130"/>
+              <a:gd name="connsiteY6" fmla="*/ 5685522 h 5685522"/>
+              <a:gd name="connsiteX0" fmla="*/ 0 w 6784876"/>
+              <a:gd name="connsiteY0" fmla="*/ 5685522 h 5685522"/>
+              <a:gd name="connsiteX1" fmla="*/ 31692 w 6784876"/>
+              <a:gd name="connsiteY1" fmla="*/ 0 h 5685522"/>
+              <a:gd name="connsiteX2" fmla="*/ 6784876 w 6784876"/>
+              <a:gd name="connsiteY2" fmla="*/ 6717 h 5685522"/>
+              <a:gd name="connsiteX3" fmla="*/ 6784876 w 6784876"/>
+              <a:gd name="connsiteY3" fmla="*/ 6717 h 5685522"/>
+              <a:gd name="connsiteX4" fmla="*/ 6784876 w 6784876"/>
+              <a:gd name="connsiteY4" fmla="*/ 4815699 h 5685522"/>
+              <a:gd name="connsiteX5" fmla="*/ 5915053 w 6784876"/>
+              <a:gd name="connsiteY5" fmla="*/ 5685522 h 5685522"/>
+              <a:gd name="connsiteX6" fmla="*/ 0 w 6784876"/>
+              <a:gd name="connsiteY6" fmla="*/ 5685522 h 5685522"/>
+            </a:gdLst>
+            <a:ahLst/>
+            <a:cxnLst>
+              <a:cxn ang="0">
+                <a:pos x="connsiteX0" y="connsiteY0"/>
+              </a:cxn>
+              <a:cxn ang="0">
+                <a:pos x="connsiteX1" y="connsiteY1"/>
+              </a:cxn>
+              <a:cxn ang="0">
+                <a:pos x="connsiteX2" y="connsiteY2"/>
+              </a:cxn>
+              <a:cxn ang="0">
+                <a:pos x="connsiteX3" y="connsiteY3"/>
+              </a:cxn>
+              <a:cxn ang="0">
+                <a:pos x="connsiteX4" y="connsiteY4"/>
+              </a:cxn>
+              <a:cxn ang="0">
+                <a:pos x="connsiteX5" y="connsiteY5"/>
+              </a:cxn>
+              <a:cxn ang="0">
+                <a:pos x="connsiteX6" y="connsiteY6"/>
+              </a:cxn>
+            </a:cxnLst>
+            <a:rect l="l" t="t" r="r" b="b"/>
+            <a:pathLst>
+              <a:path w="6784876" h="5685522">
+                <a:moveTo>
+                  <a:pt x="0" y="5685522"/>
+                </a:moveTo>
+                <a:lnTo>
+                  <a:pt x="31692" y="0"/>
+                </a:lnTo>
+                <a:lnTo>
+                  <a:pt x="6784876" y="6717"/>
+                </a:lnTo>
+                <a:lnTo>
+                  <a:pt x="6784876" y="6717"/>
+                </a:lnTo>
+                <a:lnTo>
+                  <a:pt x="6784876" y="4815699"/>
+                </a:lnTo>
+                <a:cubicBezTo>
+                  <a:pt x="6784876" y="5296089"/>
+                  <a:pt x="6395443" y="5685522"/>
+                  <a:pt x="5915053" y="5685522"/>
+                </a:cubicBezTo>
+                <a:lnTo>
+                  <a:pt x="0" y="5685522"/>
+                </a:lnTo>
+                <a:close/>
+              </a:path>
+            </a:pathLst>
+          </a:custGeom>
+        </p:spPr>
+      </p:pic>
+      <p:sp>
+        <p:nvSpPr>
+          <p:cNvPr id="7" name="Rectangle: Rounded Corners 3">
+            <a:extLst>
+              <a:ext uri="{FF2B5EF4-FFF2-40B4-BE49-F238E27FC236}">
+                <a16:creationId xmlns:a16="http://schemas.microsoft.com/office/drawing/2014/main" id="{4DCA9A03-C201-42B6-AF8D-AB31333C8852}"/>
+              </a:ext>
+            </a:extLst>
+          </p:cNvPr>
+          <p:cNvSpPr/>
+          <p:nvPr/>
+        </p:nvSpPr>
+        <p:spPr>
+          <a:xfrm>
+            <a:off x="4550245" y="735546"/>
+            <a:ext cx="3973757" cy="2082201"/>
+          </a:xfrm>
+          <a:prstGeom prst="roundRect">
+            <a:avLst>
+              <a:gd name="adj" fmla="val 8835"/>
+            </a:avLst>
+          </a:prstGeom>
+          <a:solidFill>
+            <a:schemeClr val="bg1"/>
+          </a:solidFill>
+          <a:ln>
+            <a:noFill/>
+          </a:ln>
+          <a:effectLst>
+            <a:outerShdw blurRad="635000" dist="825500" dir="9600000" algn="tr" rotWithShape="0">
+              <a:prstClr val="black">
+                <a:alpha val="20000"/>
+              </a:prstClr>
+            </a:outerShdw>
+          </a:effectLst>
+        </p:spPr>
+        <p:style>
+          <a:lnRef idx="2">
+            <a:schemeClr val="accent1">
+              <a:shade val="50000"/>
+            </a:schemeClr>
+          </a:lnRef>
+          <a:fillRef idx="1">
+            <a:schemeClr val="accent1"/>
+          </a:fillRef>
+          <a:effectRef idx="0">
+            <a:schemeClr val="accent1"/>
+          </a:effectRef>
+          <a:fontRef idx="minor">
+            <a:schemeClr val="lt1"/>
+          </a:fontRef>
+        </p:style>
+        <p:txBody>
+          <a:bodyPr rtlCol="0" anchor="ctr"/>
+          <a:lstStyle/>
+          <a:p>
+            <a:pPr algn="ctr"/>
+            <a:endParaRPr lang="en-IN" sz="1350" dirty="0"/>
+          </a:p>
+        </p:txBody>
+      </p:sp>
+      <p:sp>
+        <p:nvSpPr>
+          <p:cNvPr id="8" name="TextBox 7">
+            <a:extLst>
+              <a:ext uri="{FF2B5EF4-FFF2-40B4-BE49-F238E27FC236}">
+                <a16:creationId xmlns:a16="http://schemas.microsoft.com/office/drawing/2014/main" id="{4B09D3EC-7881-4341-8189-469046CA259E}"/>
+              </a:ext>
+            </a:extLst>
+          </p:cNvPr>
+          <p:cNvSpPr txBox="1"/>
+          <p:nvPr/>
+        </p:nvSpPr>
+        <p:spPr>
+          <a:xfrm>
+            <a:off x="4981951" y="1042138"/>
+            <a:ext cx="3179963" cy="461665"/>
+          </a:xfrm>
+          <a:prstGeom prst="rect">
+            <a:avLst/>
+          </a:prstGeom>
+          <a:noFill/>
+        </p:spPr>
+        <p:txBody>
+          <a:bodyPr wrap="square" lIns="0" tIns="0" rIns="0" bIns="0" rtlCol="0">
+            <a:spAutoFit/>
+          </a:bodyPr>
+          <a:lstStyle/>
+          <a:p>
+            <a:r>
+              <a:rPr lang="en-IN" sz="3000" b="1" dirty="0">
+                <a:solidFill>
+                  <a:srgbClr val="75C042"/>
+                </a:solidFill>
+              </a:rPr>
+              <a:t>What We </a:t>
+            </a:r>
+            <a:r>
+              <a:rPr lang="en-IN" sz="3000" b="1" dirty="0">
+                <a:solidFill>
+                  <a:srgbClr val="55E96E"/>
+                </a:solidFill>
+                <a:latin typeface="Segoe UI Light" panose="020B0502040204020203" pitchFamily="34" charset="0"/>
+                <a:cs typeface="Segoe UI Light" panose="020B0502040204020203" pitchFamily="34" charset="0"/>
+              </a:rPr>
+              <a:t>Did</a:t>
+            </a:r>
+          </a:p>
+        </p:txBody>
+      </p:sp>
+      <p:sp>
+        <p:nvSpPr>
+          <p:cNvPr id="9" name="TextBox 8">
+            <a:extLst>
+              <a:ext uri="{FF2B5EF4-FFF2-40B4-BE49-F238E27FC236}">
+                <a16:creationId xmlns:a16="http://schemas.microsoft.com/office/drawing/2014/main" id="{A0CBE2D0-9475-4BE8-AC62-B9A03DC275C3}"/>
+              </a:ext>
+            </a:extLst>
+          </p:cNvPr>
+          <p:cNvSpPr txBox="1"/>
+          <p:nvPr/>
+        </p:nvSpPr>
+        <p:spPr>
+          <a:xfrm>
+            <a:off x="4981951" y="1610639"/>
+            <a:ext cx="3179963" cy="461665"/>
+          </a:xfrm>
+          <a:prstGeom prst="rect">
+            <a:avLst/>
+          </a:prstGeom>
+          <a:noFill/>
+        </p:spPr>
+        <p:txBody>
+          <a:bodyPr wrap="square" lIns="0" tIns="0" rIns="0" bIns="0" rtlCol="0" anchor="t">
+            <a:spAutoFit/>
+          </a:bodyPr>
+          <a:lstStyle/>
+          <a:p>
+            <a:r>
+              <a:rPr lang="en-US" sz="3000" kern="0" dirty="0">
+                <a:solidFill>
+                  <a:schemeClr val="tx1">
+                    <a:lumMod val="75000"/>
+                    <a:lumOff val="25000"/>
+                  </a:schemeClr>
+                </a:solidFill>
+                <a:latin typeface="Segoe UI" panose="020B0502040204020203" pitchFamily="34" charset="0"/>
+                <a:ea typeface="Calibri Light" charset="0"/>
+                <a:cs typeface="Segoe UI" panose="020B0502040204020203" pitchFamily="34" charset="0"/>
+              </a:rPr>
+              <a:t>Let’s Summarize</a:t>
+            </a:r>
+            <a:endParaRPr lang="en-US" sz="3000" dirty="0">
+              <a:solidFill>
+                <a:schemeClr val="tx1">
+                  <a:lumMod val="75000"/>
+                  <a:lumOff val="25000"/>
+                </a:schemeClr>
+              </a:solidFill>
+              <a:latin typeface="Segoe UI" panose="020B0502040204020203" pitchFamily="34" charset="0"/>
+              <a:ea typeface="Calibri Light" charset="0"/>
+              <a:cs typeface="Segoe UI" panose="020B0502040204020203" pitchFamily="34" charset="0"/>
+            </a:endParaRPr>
+          </a:p>
+        </p:txBody>
+      </p:sp>
+      <p:grpSp>
+        <p:nvGrpSpPr>
+          <p:cNvPr id="10" name="Group 9">
+            <a:extLst>
+              <a:ext uri="{FF2B5EF4-FFF2-40B4-BE49-F238E27FC236}">
+                <a16:creationId xmlns:a16="http://schemas.microsoft.com/office/drawing/2014/main" id="{CBADDFA3-0336-41F5-81AE-B9456B828C2C}"/>
+              </a:ext>
+            </a:extLst>
+          </p:cNvPr>
+          <p:cNvGrpSpPr/>
+          <p:nvPr/>
+        </p:nvGrpSpPr>
+        <p:grpSpPr>
+          <a:xfrm>
+            <a:off x="4999393" y="2370854"/>
+            <a:ext cx="463016" cy="82493"/>
+            <a:chOff x="6006451" y="5603130"/>
+            <a:chExt cx="617354" cy="109990"/>
+          </a:xfrm>
+        </p:grpSpPr>
+        <p:sp>
+          <p:nvSpPr>
+            <p:cNvPr id="11" name="Rectangle 5">
+              <a:extLst>
+                <a:ext uri="{FF2B5EF4-FFF2-40B4-BE49-F238E27FC236}">
+                  <a16:creationId xmlns:a16="http://schemas.microsoft.com/office/drawing/2014/main" id="{EF42471A-33F9-4E04-8306-66A59FCEE04D}"/>
+                </a:ext>
+              </a:extLst>
+            </p:cNvPr>
+            <p:cNvSpPr>
+              <a:spLocks noChangeArrowheads="1"/>
+            </p:cNvSpPr>
+            <p:nvPr/>
+          </p:nvSpPr>
+          <p:spPr bwMode="auto">
+            <a:xfrm>
+              <a:off x="6006451" y="5603130"/>
+              <a:ext cx="109992" cy="109990"/>
+            </a:xfrm>
+            <a:prstGeom prst="rect">
+              <a:avLst/>
+            </a:prstGeom>
+            <a:solidFill>
+              <a:srgbClr val="00B050"/>
+            </a:solidFill>
+            <a:ln w="9525">
+              <a:noFill/>
+              <a:miter lim="800000"/>
+              <a:headEnd/>
+              <a:tailEnd/>
+            </a:ln>
+          </p:spPr>
+          <p:txBody>
+            <a:bodyPr vert="horz" wrap="square" lIns="68580" tIns="34290" rIns="68580" bIns="34290" numCol="1" anchor="t" anchorCtr="0" compatLnSpc="1">
+              <a:prstTxWarp prst="textNoShape">
+                <a:avLst/>
+              </a:prstTxWarp>
+            </a:bodyPr>
+            <a:lstStyle/>
+            <a:p>
+              <a:endParaRPr lang="en-IN" sz="1350"/>
+            </a:p>
+          </p:txBody>
+        </p:sp>
+        <p:sp>
+          <p:nvSpPr>
+            <p:cNvPr id="12" name="Rectangle 5">
+              <a:extLst>
+                <a:ext uri="{FF2B5EF4-FFF2-40B4-BE49-F238E27FC236}">
+                  <a16:creationId xmlns:a16="http://schemas.microsoft.com/office/drawing/2014/main" id="{C99CB4F6-0149-49F4-8A24-BEB708A29F1A}"/>
+                </a:ext>
+              </a:extLst>
+            </p:cNvPr>
+            <p:cNvSpPr>
+              <a:spLocks noChangeArrowheads="1"/>
+            </p:cNvSpPr>
+            <p:nvPr/>
+          </p:nvSpPr>
+          <p:spPr bwMode="auto">
+            <a:xfrm>
+              <a:off x="6260132" y="5603130"/>
+              <a:ext cx="109992" cy="109990"/>
+            </a:xfrm>
+            <a:prstGeom prst="rect">
+              <a:avLst/>
+            </a:prstGeom>
+            <a:solidFill>
+              <a:srgbClr val="75C042"/>
+            </a:solidFill>
+            <a:ln w="9525">
+              <a:noFill/>
+              <a:miter lim="800000"/>
+              <a:headEnd/>
+              <a:tailEnd/>
+            </a:ln>
+          </p:spPr>
+          <p:txBody>
+            <a:bodyPr vert="horz" wrap="square" lIns="68580" tIns="34290" rIns="68580" bIns="34290" numCol="1" anchor="t" anchorCtr="0" compatLnSpc="1">
+              <a:prstTxWarp prst="textNoShape">
+                <a:avLst/>
+              </a:prstTxWarp>
+            </a:bodyPr>
+            <a:lstStyle/>
+            <a:p>
+              <a:endParaRPr lang="en-IN" sz="1350"/>
+            </a:p>
+          </p:txBody>
+        </p:sp>
+        <p:sp>
+          <p:nvSpPr>
+            <p:cNvPr id="13" name="Rectangle 5">
+              <a:extLst>
+                <a:ext uri="{FF2B5EF4-FFF2-40B4-BE49-F238E27FC236}">
+                  <a16:creationId xmlns:a16="http://schemas.microsoft.com/office/drawing/2014/main" id="{8BED369E-8B8A-45FD-8B5A-703CE09C2946}"/>
+                </a:ext>
+              </a:extLst>
+            </p:cNvPr>
+            <p:cNvSpPr>
+              <a:spLocks noChangeArrowheads="1"/>
+            </p:cNvSpPr>
+            <p:nvPr/>
+          </p:nvSpPr>
+          <p:spPr bwMode="auto">
+            <a:xfrm>
+              <a:off x="6513813" y="5603130"/>
+              <a:ext cx="109992" cy="109990"/>
+            </a:xfrm>
+            <a:prstGeom prst="rect">
+              <a:avLst/>
+            </a:prstGeom>
+            <a:solidFill>
+              <a:srgbClr val="0AEC25"/>
+            </a:solidFill>
+            <a:ln w="9525">
+              <a:noFill/>
+              <a:miter lim="800000"/>
+              <a:headEnd/>
+              <a:tailEnd/>
+            </a:ln>
+          </p:spPr>
+          <p:txBody>
+            <a:bodyPr vert="horz" wrap="square" lIns="68580" tIns="34290" rIns="68580" bIns="34290" numCol="1" anchor="t" anchorCtr="0" compatLnSpc="1">
+              <a:prstTxWarp prst="textNoShape">
+                <a:avLst/>
+              </a:prstTxWarp>
+            </a:bodyPr>
+            <a:lstStyle/>
+            <a:p>
+              <a:endParaRPr lang="en-IN" sz="1350"/>
+            </a:p>
+          </p:txBody>
+        </p:sp>
+      </p:grpSp>
+      <p:sp>
+        <p:nvSpPr>
+          <p:cNvPr id="14" name="Google Shape;845;p16"/>
+          <p:cNvSpPr/>
+          <p:nvPr/>
+        </p:nvSpPr>
+        <p:spPr>
+          <a:xfrm>
+            <a:off x="1190" y="0"/>
+            <a:ext cx="1494765" cy="736929"/>
+          </a:xfrm>
+          <a:custGeom>
+            <a:avLst/>
+            <a:gdLst/>
+            <a:ahLst/>
+            <a:cxnLst/>
+            <a:rect l="l" t="t" r="r" b="b"/>
+            <a:pathLst>
+              <a:path w="1993020" h="1803466" extrusionOk="0">
+                <a:moveTo>
+                  <a:pt x="0" y="0"/>
+                </a:moveTo>
+                <a:lnTo>
+                  <a:pt x="1993020" y="0"/>
+                </a:lnTo>
+                <a:lnTo>
+                  <a:pt x="1229306" y="1803466"/>
+                </a:lnTo>
+                <a:lnTo>
+                  <a:pt x="0" y="1803466"/>
+                </a:lnTo>
+                <a:lnTo>
+                  <a:pt x="0" y="0"/>
+                </a:lnTo>
+                <a:close/>
+              </a:path>
+            </a:pathLst>
+          </a:custGeom>
+          <a:solidFill>
+            <a:srgbClr val="75C042"/>
+          </a:solidFill>
+          <a:ln>
+            <a:noFill/>
+          </a:ln>
+        </p:spPr>
+        <p:txBody>
+          <a:bodyPr spcFirstLastPara="1" wrap="square" lIns="68569" tIns="34275" rIns="68569" bIns="34275" anchor="ctr" anchorCtr="0">
+            <a:noAutofit/>
+          </a:bodyPr>
+          <a:lstStyle/>
+          <a:p>
+            <a:pPr algn="ctr" defTabSz="685800">
+              <a:buClr>
+                <a:srgbClr val="000000"/>
+              </a:buClr>
+              <a:defRPr/>
+            </a:pPr>
+            <a:endParaRPr sz="1350" kern="0">
+              <a:solidFill>
+                <a:srgbClr val="75C042"/>
+              </a:solidFill>
+              <a:latin typeface="Calibri"/>
+              <a:ea typeface="Calibri"/>
+              <a:cs typeface="Calibri"/>
+              <a:sym typeface="Calibri"/>
+            </a:endParaRPr>
+          </a:p>
+        </p:txBody>
+      </p:sp>
+      <p:sp>
+        <p:nvSpPr>
+          <p:cNvPr id="16" name="Google Shape;552;p2"/>
+          <p:cNvSpPr txBox="1"/>
+          <p:nvPr/>
+        </p:nvSpPr>
+        <p:spPr>
+          <a:xfrm>
+            <a:off x="7108178" y="4873864"/>
+            <a:ext cx="2251926" cy="253885"/>
+          </a:xfrm>
+          <a:prstGeom prst="rect">
+            <a:avLst/>
+          </a:prstGeom>
+          <a:noFill/>
+          <a:ln>
+            <a:noFill/>
+          </a:ln>
+        </p:spPr>
+        <p:txBody>
+          <a:bodyPr spcFirstLastPara="1" wrap="square" lIns="68569" tIns="34275" rIns="68569" bIns="34275" anchor="t" anchorCtr="0">
+            <a:spAutoFit/>
+          </a:bodyPr>
+          <a:lstStyle/>
+          <a:p>
+            <a:r>
+              <a:rPr lang="en-US" sz="1200" dirty="0">
+                <a:solidFill>
+                  <a:srgbClr val="75C042"/>
+                </a:solidFill>
+                <a:latin typeface="Cambria" panose="02040503050406030204" pitchFamily="18" charset="0"/>
+                <a:ea typeface="Cambria" panose="02040503050406030204" pitchFamily="18" charset="0"/>
+                <a:cs typeface="Corben"/>
+                <a:sym typeface="Corben"/>
+              </a:rPr>
+              <a:t>www.anubhavtrainings.com</a:t>
+            </a:r>
+            <a:endParaRPr sz="1200" dirty="0">
+              <a:solidFill>
+                <a:srgbClr val="75C042"/>
+              </a:solidFill>
+              <a:latin typeface="Cambria" panose="02040503050406030204" pitchFamily="18" charset="0"/>
+              <a:ea typeface="Cambria" panose="02040503050406030204" pitchFamily="18" charset="0"/>
+              <a:cs typeface="Corben"/>
+              <a:sym typeface="Corben"/>
+            </a:endParaRPr>
+          </a:p>
+        </p:txBody>
+      </p:sp>
+      <p:pic>
+        <p:nvPicPr>
+          <p:cNvPr id="17" name="Picture 4">
+            <a:extLst>
+              <a:ext uri="{FF2B5EF4-FFF2-40B4-BE49-F238E27FC236}">
+                <a16:creationId xmlns:a16="http://schemas.microsoft.com/office/drawing/2014/main" id="{DB8A7F7E-7F2C-20C1-2A09-7D9F11F6AD11}"/>
+              </a:ext>
+            </a:extLst>
+          </p:cNvPr>
+          <p:cNvPicPr>
+            <a:picLocks noChangeAspect="1" noChangeArrowheads="1"/>
+          </p:cNvPicPr>
+          <p:nvPr/>
+        </p:nvPicPr>
+        <p:blipFill>
+          <a:blip r:embed="rId3" cstate="print">
+            <a:extLst>
+              <a:ext uri="{28A0092B-C50C-407E-A947-70E740481C1C}">
+                <a14:useLocalDpi xmlns:a14="http://schemas.microsoft.com/office/drawing/2010/main" val="0"/>
+              </a:ext>
+            </a:extLst>
+          </a:blip>
+          <a:srcRect/>
+          <a:stretch>
+            <a:fillRect/>
+          </a:stretch>
+        </p:blipFill>
+        <p:spPr bwMode="auto">
+          <a:xfrm>
+            <a:off x="8650243" y="0"/>
+            <a:ext cx="491377" cy="485336"/>
+          </a:xfrm>
+          <a:prstGeom prst="rect">
+            <a:avLst/>
+          </a:prstGeom>
+          <a:noFill/>
+          <a:extLst>
+            <a:ext uri="{909E8E84-426E-40DD-AFC4-6F175D3DCCD1}">
+              <a14:hiddenFill xmlns:a14="http://schemas.microsoft.com/office/drawing/2010/main">
+                <a:solidFill>
+                  <a:srgbClr val="FFFFFF"/>
+                </a:solidFill>
+              </a14:hiddenFill>
+            </a:ext>
+          </a:extLst>
+        </p:spPr>
+      </p:pic>
+    </p:spTree>
+    <p:extLst>
+      <p:ext uri="{BB962C8B-B14F-4D97-AF65-F5344CB8AC3E}">
+        <p14:creationId xmlns:p14="http://schemas.microsoft.com/office/powerpoint/2010/main" val="2376139371"/>
+      </p:ext>
+    </p:extLst>
+  </p:cSld>
+  <p:clrMapOvr>
+    <a:masterClrMapping/>
+  </p:clrMapOvr>
+  <p:timing>
+    <p:tnLst>
+      <p:par>
+        <p:cTn id="1" dur="indefinite" restart="never" nodeType="tmRoot">
+          <p:childTnLst>
+            <p:seq concurrent="1" nextAc="seek">
+              <p:cTn id="2" dur="indefinite" nodeType="mainSeq">
+                <p:childTnLst>
+                  <p:par>
+                    <p:cTn id="3" fill="hold">
+                      <p:stCondLst>
+                        <p:cond delay="indefinite"/>
+                      </p:stCondLst>
+                      <p:childTnLst>
+                        <p:par>
+                          <p:cTn id="4" fill="hold">
+                            <p:stCondLst>
+                              <p:cond delay="0"/>
+                            </p:stCondLst>
+                            <p:childTnLst>
+                              <p:par>
+                                <p:cTn id="5" presetID="16" presetClass="entr" presetSubtype="21" fill="hold" grpId="0" nodeType="clickEffect">
+                                  <p:stCondLst>
+                                    <p:cond delay="0"/>
+                                  </p:stCondLst>
+                                  <p:childTnLst>
+                                    <p:set>
+                                      <p:cBhvr>
+                                        <p:cTn id="6" dur="1" fill="hold">
+                                          <p:stCondLst>
+                                            <p:cond delay="0"/>
+                                          </p:stCondLst>
+                                        </p:cTn>
+                                        <p:tgtEl>
+                                          <p:spTgt spid="8"/>
+                                        </p:tgtEl>
+                                        <p:attrNameLst>
+                                          <p:attrName>style.visibility</p:attrName>
+                                        </p:attrNameLst>
+                                      </p:cBhvr>
+                                      <p:to>
+                                        <p:strVal val="visible"/>
+                                      </p:to>
+                                    </p:set>
+                                    <p:animEffect transition="in" filter="barn(inVertical)">
+                                      <p:cBhvr>
+                                        <p:cTn id="7" dur="500"/>
+                                        <p:tgtEl>
+                                          <p:spTgt spid="8"/>
+                                        </p:tgtEl>
+                                      </p:cBhvr>
+                                    </p:animEffect>
+                                  </p:childTnLst>
+                                </p:cTn>
+                              </p:par>
+                              <p:par>
+                                <p:cTn id="8" presetID="16" presetClass="entr" presetSubtype="21" fill="hold" grpId="0" nodeType="withEffect">
+                                  <p:stCondLst>
+                                    <p:cond delay="0"/>
+                                  </p:stCondLst>
+                                  <p:childTnLst>
+                                    <p:set>
+                                      <p:cBhvr>
+                                        <p:cTn id="9" dur="1" fill="hold">
+                                          <p:stCondLst>
+                                            <p:cond delay="0"/>
+                                          </p:stCondLst>
+                                        </p:cTn>
+                                        <p:tgtEl>
+                                          <p:spTgt spid="9"/>
+                                        </p:tgtEl>
+                                        <p:attrNameLst>
+                                          <p:attrName>style.visibility</p:attrName>
+                                        </p:attrNameLst>
+                                      </p:cBhvr>
+                                      <p:to>
+                                        <p:strVal val="visible"/>
+                                      </p:to>
+                                    </p:set>
+                                    <p:animEffect transition="in" filter="barn(inVertical)">
+                                      <p:cBhvr>
+                                        <p:cTn id="10" dur="500"/>
+                                        <p:tgtEl>
+                                          <p:spTgt spid="9"/>
+                                        </p:tgtEl>
+                                      </p:cBhvr>
+                                    </p:animEffect>
+                                  </p:childTnLst>
+                                </p:cTn>
+                              </p:par>
+                              <p:par>
+                                <p:cTn id="11" presetID="16" presetClass="entr" presetSubtype="21" fill="hold" nodeType="withEffect">
+                                  <p:stCondLst>
+                                    <p:cond delay="0"/>
+                                  </p:stCondLst>
+                                  <p:childTnLst>
+                                    <p:set>
+                                      <p:cBhvr>
+                                        <p:cTn id="12" dur="1" fill="hold">
+                                          <p:stCondLst>
+                                            <p:cond delay="0"/>
+                                          </p:stCondLst>
+                                        </p:cTn>
+                                        <p:tgtEl>
+                                          <p:spTgt spid="10"/>
+                                        </p:tgtEl>
+                                        <p:attrNameLst>
+                                          <p:attrName>style.visibility</p:attrName>
+                                        </p:attrNameLst>
+                                      </p:cBhvr>
+                                      <p:to>
+                                        <p:strVal val="visible"/>
+                                      </p:to>
+                                    </p:set>
+                                    <p:animEffect transition="in" filter="barn(inVertical)">
+                                      <p:cBhvr>
+                                        <p:cTn id="13" dur="500"/>
+                                        <p:tgtEl>
+                                          <p:spTgt spid="10"/>
+                                        </p:tgtEl>
+                                      </p:cBhvr>
+                                    </p:animEffect>
+                                  </p:childTnLst>
+                                </p:cTn>
+                              </p:par>
+                              <p:par>
+                                <p:cTn id="14" presetID="16" presetClass="entr" presetSubtype="21" fill="hold" grpId="0" nodeType="withEffect">
+                                  <p:stCondLst>
+                                    <p:cond delay="0"/>
+                                  </p:stCondLst>
+                                  <p:childTnLst>
+                                    <p:set>
+                                      <p:cBhvr>
+                                        <p:cTn id="15" dur="1" fill="hold">
+                                          <p:stCondLst>
+                                            <p:cond delay="0"/>
+                                          </p:stCondLst>
+                                        </p:cTn>
+                                        <p:tgtEl>
+                                          <p:spTgt spid="7"/>
+                                        </p:tgtEl>
+                                        <p:attrNameLst>
+                                          <p:attrName>style.visibility</p:attrName>
+                                        </p:attrNameLst>
+                                      </p:cBhvr>
+                                      <p:to>
+                                        <p:strVal val="visible"/>
+                                      </p:to>
+                                    </p:set>
+                                    <p:animEffect transition="in" filter="barn(inVertical)">
+                                      <p:cBhvr>
+                                        <p:cTn id="16" dur="500"/>
+                                        <p:tgtEl>
+                                          <p:spTgt spid="7"/>
+                                        </p:tgtEl>
+                                      </p:cBhvr>
+                                    </p:animEffect>
+                                  </p:childTnLst>
+                                </p:cTn>
+                              </p:par>
+                              <p:par>
+                                <p:cTn id="17" presetID="16" presetClass="entr" presetSubtype="21" fill="hold" grpId="0" nodeType="withEffect">
+                                  <p:stCondLst>
+                                    <p:cond delay="0"/>
+                                  </p:stCondLst>
+                                  <p:childTnLst>
+                                    <p:set>
+                                      <p:cBhvr>
+                                        <p:cTn id="18" dur="1" fill="hold">
+                                          <p:stCondLst>
+                                            <p:cond delay="0"/>
+                                          </p:stCondLst>
+                                        </p:cTn>
+                                        <p:tgtEl>
+                                          <p:spTgt spid="5"/>
+                                        </p:tgtEl>
+                                        <p:attrNameLst>
+                                          <p:attrName>style.visibility</p:attrName>
+                                        </p:attrNameLst>
+                                      </p:cBhvr>
+                                      <p:to>
+                                        <p:strVal val="visible"/>
+                                      </p:to>
+                                    </p:set>
+                                    <p:animEffect transition="in" filter="barn(inVertical)">
+                                      <p:cBhvr>
+                                        <p:cTn id="19" dur="500"/>
+                                        <p:tgtEl>
+                                          <p:spTgt spid="5"/>
+                                        </p:tgtEl>
+                                      </p:cBhvr>
+                                    </p:animEffect>
+                                  </p:childTnLst>
+                                </p:cTn>
+                              </p:par>
+                            </p:childTnLst>
+                          </p:cTn>
+                        </p:par>
+                      </p:childTnLst>
+                    </p:cTn>
+                  </p:par>
+                </p:childTnLst>
+              </p:cTn>
+              <p:prevCondLst>
+                <p:cond evt="onPrev" delay="0">
+                  <p:tgtEl>
+                    <p:sldTgt/>
+                  </p:tgtEl>
+                </p:cond>
+              </p:prevCondLst>
+              <p:nextCondLst>
+                <p:cond evt="onNext" delay="0">
+                  <p:tgtEl>
+                    <p:sldTgt/>
+                  </p:tgtEl>
+                </p:cond>
+              </p:nextCondLst>
+            </p:seq>
+          </p:childTnLst>
+        </p:cTn>
+      </p:par>
+    </p:tnLst>
+    <p:bldLst>
+      <p:bldP spid="5" grpId="0" animBg="1"/>
+      <p:bldP spid="7" grpId="0" animBg="1"/>
+      <p:bldP spid="8" grpId="0"/>
+      <p:bldP spid="9" grpId="0"/>
+    </p:bldLst>
+  </p:timing>
+</p:sld>
+</file>
+
+<file path=ppt/slides/slide13.xml><?xml version="1.0" encoding="utf-8"?>
+<p:sld xmlns:a="http://schemas.openxmlformats.org/drawingml/2006/main" xmlns:r="http://schemas.openxmlformats.org/officeDocument/2006/relationships" xmlns:p="http://schemas.openxmlformats.org/presentationml/2006/main">
+  <p:cSld>
+    <p:spTree>
+      <p:nvGrpSpPr>
         <p:cNvPr id="1" name=""/>
         <p:cNvGrpSpPr/>
         <p:nvPr/>
@@ -13245,7 +14847,7 @@
 </p:sld>
 </file>
 
-<file path=ppt/slides/slide11.xml><?xml version="1.0" encoding="utf-8"?>
+<file path=ppt/slides/slide14.xml><?xml version="1.0" encoding="utf-8"?>
 <p:sld xmlns:a="http://schemas.openxmlformats.org/drawingml/2006/main" xmlns:r="http://schemas.openxmlformats.org/officeDocument/2006/relationships" xmlns:p="http://schemas.openxmlformats.org/presentationml/2006/main">
   <p:cSld>
     <p:spTree>
@@ -17336,7 +18938,7 @@
         <p:spPr>
           <a:xfrm>
             <a:off x="4724400" y="2929176"/>
-            <a:ext cx="1600200" cy="307777"/>
+            <a:ext cx="1600200" cy="523220"/>
           </a:xfrm>
           <a:prstGeom prst="rect">
             <a:avLst/>
@@ -17358,7 +18960,7 @@
                 <a:latin typeface="Arial" pitchFamily="34" charset="0"/>
                 <a:cs typeface="Arial" pitchFamily="34" charset="0"/>
               </a:rPr>
-              <a:t>Using JS Block</a:t>
+              <a:t>Create offline table</a:t>
             </a:r>
             <a:endParaRPr lang="en-US" sz="1100" dirty="0">
               <a:solidFill>
@@ -17403,7 +19005,7 @@
                 <a:latin typeface="Arial" pitchFamily="34" charset="0"/>
                 <a:cs typeface="Arial" pitchFamily="34" charset="0"/>
               </a:rPr>
-              <a:t>Deep insert data</a:t>
+              <a:t>Working with offline store</a:t>
             </a:r>
             <a:endParaRPr lang="en-US" sz="1100" dirty="0">
               <a:solidFill>
@@ -30285,6 +31887,591 @@
         <p:cNvPr id="1" name="">
           <a:extLst>
             <a:ext uri="{FF2B5EF4-FFF2-40B4-BE49-F238E27FC236}">
+              <a16:creationId xmlns:a16="http://schemas.microsoft.com/office/drawing/2014/main" id="{172291AB-984A-ECFA-B9C9-EBC1DF18F8B0}"/>
+            </a:ext>
+          </a:extLst>
+        </p:cNvPr>
+        <p:cNvGrpSpPr/>
+        <p:nvPr/>
+      </p:nvGrpSpPr>
+      <p:grpSpPr>
+        <a:xfrm>
+          <a:off x="0" y="0"/>
+          <a:ext cx="0" cy="0"/>
+          <a:chOff x="0" y="0"/>
+          <a:chExt cx="0" cy="0"/>
+        </a:xfrm>
+      </p:grpSpPr>
+      <p:sp>
+        <p:nvSpPr>
+          <p:cNvPr id="3" name="Footer Placeholder 2">
+            <a:extLst>
+              <a:ext uri="{FF2B5EF4-FFF2-40B4-BE49-F238E27FC236}">
+                <a16:creationId xmlns:a16="http://schemas.microsoft.com/office/drawing/2014/main" id="{A9D19D27-AC5C-6E0C-75BA-1BE0AD0AE34B}"/>
+              </a:ext>
+            </a:extLst>
+          </p:cNvPr>
+          <p:cNvSpPr>
+            <a:spLocks noGrp="1"/>
+          </p:cNvSpPr>
+          <p:nvPr>
+            <p:ph type="ftr" sz="quarter" idx="11"/>
+          </p:nvPr>
+        </p:nvSpPr>
+        <p:spPr/>
+        <p:txBody>
+          <a:bodyPr/>
+          <a:lstStyle/>
+          <a:p>
+            <a:r>
+              <a:rPr lang="en-US" dirty="0"/>
+              <a:t>www.anubhavtrainings.com</a:t>
+            </a:r>
+          </a:p>
+        </p:txBody>
+      </p:sp>
+      <p:sp>
+        <p:nvSpPr>
+          <p:cNvPr id="4" name="Slide Number Placeholder 3">
+            <a:extLst>
+              <a:ext uri="{FF2B5EF4-FFF2-40B4-BE49-F238E27FC236}">
+                <a16:creationId xmlns:a16="http://schemas.microsoft.com/office/drawing/2014/main" id="{20464D06-7E17-FA94-BF3E-710B3F32F0DB}"/>
+              </a:ext>
+            </a:extLst>
+          </p:cNvPr>
+          <p:cNvSpPr>
+            <a:spLocks noGrp="1"/>
+          </p:cNvSpPr>
+          <p:nvPr>
+            <p:ph type="sldNum" sz="quarter" idx="12"/>
+          </p:nvPr>
+        </p:nvSpPr>
+        <p:spPr>
+          <a:xfrm>
+            <a:off x="152400" y="4781550"/>
+            <a:ext cx="457200" cy="273844"/>
+          </a:xfrm>
+        </p:spPr>
+        <p:txBody>
+          <a:bodyPr/>
+          <a:lstStyle/>
+          <a:p>
+            <a:fld id="{B6F15528-21DE-4FAA-801E-634DDDAF4B2B}" type="slidenum">
+              <a:rPr lang="en-US" smtClean="0"/>
+              <a:pPr/>
+              <a:t>6</a:t>
+            </a:fld>
+            <a:endParaRPr lang="en-US" dirty="0"/>
+          </a:p>
+        </p:txBody>
+      </p:sp>
+      <p:sp>
+        <p:nvSpPr>
+          <p:cNvPr id="5" name="Title 4">
+            <a:extLst>
+              <a:ext uri="{FF2B5EF4-FFF2-40B4-BE49-F238E27FC236}">
+                <a16:creationId xmlns:a16="http://schemas.microsoft.com/office/drawing/2014/main" id="{F6B8BB7B-692F-E2D8-B105-AB2AAFF640B2}"/>
+              </a:ext>
+            </a:extLst>
+          </p:cNvPr>
+          <p:cNvSpPr>
+            <a:spLocks noGrp="1"/>
+          </p:cNvSpPr>
+          <p:nvPr>
+            <p:ph type="title"/>
+          </p:nvPr>
+        </p:nvSpPr>
+        <p:spPr>
+          <a:xfrm>
+            <a:off x="76200" y="133350"/>
+            <a:ext cx="8229600" cy="533401"/>
+          </a:xfrm>
+        </p:spPr>
+        <p:txBody>
+          <a:bodyPr/>
+          <a:lstStyle/>
+          <a:p>
+            <a:r>
+              <a:rPr lang="en-IN" sz="2500" dirty="0">
+                <a:latin typeface="Cooper Black" panose="0208090404030B020404" pitchFamily="18" charset="0"/>
+              </a:rPr>
+              <a:t>What is Cloud Function</a:t>
+            </a:r>
+          </a:p>
+        </p:txBody>
+      </p:sp>
+      <p:sp>
+        <p:nvSpPr>
+          <p:cNvPr id="2" name="TextBox 1">
+            <a:extLst>
+              <a:ext uri="{FF2B5EF4-FFF2-40B4-BE49-F238E27FC236}">
+                <a16:creationId xmlns:a16="http://schemas.microsoft.com/office/drawing/2014/main" id="{13C71743-A852-AC8B-64C5-B2E7D978A4B9}"/>
+              </a:ext>
+            </a:extLst>
+          </p:cNvPr>
+          <p:cNvSpPr txBox="1"/>
+          <p:nvPr/>
+        </p:nvSpPr>
+        <p:spPr>
+          <a:xfrm>
+            <a:off x="152400" y="971549"/>
+            <a:ext cx="8839200" cy="4069557"/>
+          </a:xfrm>
+          <a:prstGeom prst="rect">
+            <a:avLst/>
+          </a:prstGeom>
+        </p:spPr>
+        <p:txBody>
+          <a:bodyPr vert="horz" lIns="91440" tIns="45720" rIns="91440" bIns="45720" rtlCol="0">
+            <a:normAutofit/>
+          </a:bodyPr>
+          <a:lstStyle/>
+          <a:p>
+            <a:pPr>
+              <a:spcBef>
+                <a:spcPct val="20000"/>
+              </a:spcBef>
+              <a:buFont typeface="Arial" pitchFamily="34" charset="0"/>
+            </a:pPr>
+            <a:r>
+              <a:rPr lang="en-US" sz="1400" b="0" i="0" dirty="0">
+                <a:effectLst/>
+              </a:rPr>
+              <a:t>A Cloud function allows us to perform single/multiple database operations on entity/multiple entities together as a single flow of execution. It offers below advantages</a:t>
+            </a:r>
+          </a:p>
+          <a:p>
+            <a:pPr>
+              <a:spcBef>
+                <a:spcPct val="20000"/>
+              </a:spcBef>
+              <a:buFont typeface="Arial" pitchFamily="34" charset="0"/>
+            </a:pPr>
+            <a:endParaRPr lang="en-US" sz="1400" b="0" i="0" dirty="0">
+              <a:effectLst/>
+            </a:endParaRPr>
+          </a:p>
+          <a:p>
+            <a:pPr marL="285750" indent="-285750">
+              <a:spcBef>
+                <a:spcPct val="20000"/>
+              </a:spcBef>
+              <a:buFont typeface="Arial" panose="020B0604020202020204" pitchFamily="34" charset="0"/>
+              <a:buChar char="•"/>
+            </a:pPr>
+            <a:r>
+              <a:rPr lang="en-US" sz="1400" dirty="0"/>
+              <a:t>Secure access to entities </a:t>
+            </a:r>
+          </a:p>
+          <a:p>
+            <a:pPr marL="285750" indent="-285750">
+              <a:spcBef>
+                <a:spcPct val="20000"/>
+              </a:spcBef>
+              <a:buFont typeface="Arial" panose="020B0604020202020204" pitchFamily="34" charset="0"/>
+              <a:buChar char="•"/>
+            </a:pPr>
+            <a:r>
+              <a:rPr lang="en-US" sz="1400" dirty="0"/>
+              <a:t>Sequence of multiple DB operations on multiple entities can be clubbed</a:t>
+            </a:r>
+          </a:p>
+          <a:p>
+            <a:pPr marL="285750" indent="-285750">
+              <a:spcBef>
+                <a:spcPct val="20000"/>
+              </a:spcBef>
+              <a:buFont typeface="Arial" panose="020B0604020202020204" pitchFamily="34" charset="0"/>
+              <a:buChar char="•"/>
+            </a:pPr>
+            <a:r>
+              <a:rPr lang="en-US" sz="1400" dirty="0"/>
+              <a:t>Transactional consistency ensured</a:t>
+            </a:r>
+          </a:p>
+          <a:p>
+            <a:pPr marL="285750" indent="-285750">
+              <a:spcBef>
+                <a:spcPct val="20000"/>
+              </a:spcBef>
+              <a:buFont typeface="Arial" panose="020B0604020202020204" pitchFamily="34" charset="0"/>
+              <a:buChar char="•"/>
+            </a:pPr>
+            <a:r>
+              <a:rPr lang="en-US" sz="1400" dirty="0"/>
+              <a:t>Chain many database operations together</a:t>
+            </a:r>
+          </a:p>
+        </p:txBody>
+      </p:sp>
+    </p:spTree>
+    <p:extLst>
+      <p:ext uri="{BB962C8B-B14F-4D97-AF65-F5344CB8AC3E}">
+        <p14:creationId xmlns:p14="http://schemas.microsoft.com/office/powerpoint/2010/main" val="2612508096"/>
+      </p:ext>
+    </p:extLst>
+  </p:cSld>
+  <p:clrMapOvr>
+    <a:masterClrMapping/>
+  </p:clrMapOvr>
+  <mc:AlternateContent xmlns:mc="http://schemas.openxmlformats.org/markup-compatibility/2006" xmlns:p14="http://schemas.microsoft.com/office/powerpoint/2010/main">
+    <mc:Choice Requires="p14">
+      <p:transition spd="med" p14:dur="700">
+        <p:fade/>
+      </p:transition>
+    </mc:Choice>
+    <mc:Fallback xmlns="">
+      <p:transition spd="med">
+        <p:fade/>
+      </p:transition>
+    </mc:Fallback>
+  </mc:AlternateContent>
+</p:sld>
+</file>
+
+<file path=ppt/slides/slide7.xml><?xml version="1.0" encoding="utf-8"?>
+<p:sld xmlns:a="http://schemas.openxmlformats.org/drawingml/2006/main" xmlns:r="http://schemas.openxmlformats.org/officeDocument/2006/relationships" xmlns:p="http://schemas.openxmlformats.org/presentationml/2006/main">
+  <p:cSld>
+    <p:spTree>
+      <p:nvGrpSpPr>
+        <p:cNvPr id="1" name="">
+          <a:extLst>
+            <a:ext uri="{FF2B5EF4-FFF2-40B4-BE49-F238E27FC236}">
+              <a16:creationId xmlns:a16="http://schemas.microsoft.com/office/drawing/2014/main" id="{A5D96E0C-8AAA-F5D7-B94C-59843A9845AC}"/>
+            </a:ext>
+          </a:extLst>
+        </p:cNvPr>
+        <p:cNvGrpSpPr/>
+        <p:nvPr/>
+      </p:nvGrpSpPr>
+      <p:grpSpPr>
+        <a:xfrm>
+          <a:off x="0" y="0"/>
+          <a:ext cx="0" cy="0"/>
+          <a:chOff x="0" y="0"/>
+          <a:chExt cx="0" cy="0"/>
+        </a:xfrm>
+      </p:grpSpPr>
+      <p:sp>
+        <p:nvSpPr>
+          <p:cNvPr id="3" name="Footer Placeholder 2">
+            <a:extLst>
+              <a:ext uri="{FF2B5EF4-FFF2-40B4-BE49-F238E27FC236}">
+                <a16:creationId xmlns:a16="http://schemas.microsoft.com/office/drawing/2014/main" id="{70240B2C-0C6E-763C-3CAC-3991EADAD844}"/>
+              </a:ext>
+            </a:extLst>
+          </p:cNvPr>
+          <p:cNvSpPr>
+            <a:spLocks noGrp="1"/>
+          </p:cNvSpPr>
+          <p:nvPr>
+            <p:ph type="ftr" sz="quarter" idx="11"/>
+          </p:nvPr>
+        </p:nvSpPr>
+        <p:spPr/>
+        <p:txBody>
+          <a:bodyPr/>
+          <a:lstStyle/>
+          <a:p>
+            <a:r>
+              <a:rPr lang="en-US" dirty="0"/>
+              <a:t>www.anubhavtrainings.com</a:t>
+            </a:r>
+          </a:p>
+        </p:txBody>
+      </p:sp>
+      <p:sp>
+        <p:nvSpPr>
+          <p:cNvPr id="4" name="Slide Number Placeholder 3">
+            <a:extLst>
+              <a:ext uri="{FF2B5EF4-FFF2-40B4-BE49-F238E27FC236}">
+                <a16:creationId xmlns:a16="http://schemas.microsoft.com/office/drawing/2014/main" id="{C90C172E-DA8C-B0EA-6D4F-B65AB7781DA4}"/>
+              </a:ext>
+            </a:extLst>
+          </p:cNvPr>
+          <p:cNvSpPr>
+            <a:spLocks noGrp="1"/>
+          </p:cNvSpPr>
+          <p:nvPr>
+            <p:ph type="sldNum" sz="quarter" idx="12"/>
+          </p:nvPr>
+        </p:nvSpPr>
+        <p:spPr>
+          <a:xfrm>
+            <a:off x="152400" y="4781550"/>
+            <a:ext cx="457200" cy="273844"/>
+          </a:xfrm>
+        </p:spPr>
+        <p:txBody>
+          <a:bodyPr/>
+          <a:lstStyle/>
+          <a:p>
+            <a:fld id="{B6F15528-21DE-4FAA-801E-634DDDAF4B2B}" type="slidenum">
+              <a:rPr lang="en-US" smtClean="0"/>
+              <a:pPr/>
+              <a:t>7</a:t>
+            </a:fld>
+            <a:endParaRPr lang="en-US" dirty="0"/>
+          </a:p>
+        </p:txBody>
+      </p:sp>
+      <p:sp>
+        <p:nvSpPr>
+          <p:cNvPr id="5" name="Title 4">
+            <a:extLst>
+              <a:ext uri="{FF2B5EF4-FFF2-40B4-BE49-F238E27FC236}">
+                <a16:creationId xmlns:a16="http://schemas.microsoft.com/office/drawing/2014/main" id="{0B56788A-7E56-FC87-B0BC-25497B1FC4FA}"/>
+              </a:ext>
+            </a:extLst>
+          </p:cNvPr>
+          <p:cNvSpPr>
+            <a:spLocks noGrp="1"/>
+          </p:cNvSpPr>
+          <p:nvPr>
+            <p:ph type="title"/>
+          </p:nvPr>
+        </p:nvSpPr>
+        <p:spPr>
+          <a:xfrm>
+            <a:off x="76200" y="133350"/>
+            <a:ext cx="8229600" cy="533401"/>
+          </a:xfrm>
+        </p:spPr>
+        <p:txBody>
+          <a:bodyPr/>
+          <a:lstStyle/>
+          <a:p>
+            <a:r>
+              <a:rPr lang="en-IN" sz="2500" dirty="0">
+                <a:latin typeface="Cooper Black" panose="0208090404030B020404" pitchFamily="18" charset="0"/>
+              </a:rPr>
+              <a:t>What is offline Store</a:t>
+            </a:r>
+          </a:p>
+        </p:txBody>
+      </p:sp>
+      <p:sp>
+        <p:nvSpPr>
+          <p:cNvPr id="2" name="TextBox 1">
+            <a:extLst>
+              <a:ext uri="{FF2B5EF4-FFF2-40B4-BE49-F238E27FC236}">
+                <a16:creationId xmlns:a16="http://schemas.microsoft.com/office/drawing/2014/main" id="{49634BAD-49A7-E12D-F543-CE2CEFD955D9}"/>
+              </a:ext>
+            </a:extLst>
+          </p:cNvPr>
+          <p:cNvSpPr txBox="1"/>
+          <p:nvPr/>
+        </p:nvSpPr>
+        <p:spPr>
+          <a:xfrm>
+            <a:off x="152400" y="971549"/>
+            <a:ext cx="8839200" cy="4069557"/>
+          </a:xfrm>
+          <a:prstGeom prst="rect">
+            <a:avLst/>
+          </a:prstGeom>
+        </p:spPr>
+        <p:txBody>
+          <a:bodyPr vert="horz" lIns="91440" tIns="45720" rIns="91440" bIns="45720" rtlCol="0">
+            <a:normAutofit/>
+          </a:bodyPr>
+          <a:lstStyle/>
+          <a:p>
+            <a:pPr>
+              <a:spcBef>
+                <a:spcPct val="20000"/>
+              </a:spcBef>
+              <a:buFont typeface="Arial" pitchFamily="34" charset="0"/>
+            </a:pPr>
+            <a:r>
+              <a:rPr lang="en-US" sz="1400" b="0" i="0" dirty="0">
+                <a:effectLst/>
+              </a:rPr>
+              <a:t>An offline store is a local database (based on SQLite or </a:t>
+            </a:r>
+            <a:r>
+              <a:rPr lang="en-US" sz="1400" b="0" i="0" dirty="0" err="1">
+                <a:effectLst/>
+              </a:rPr>
+              <a:t>IndexedDB</a:t>
+            </a:r>
+            <a:r>
+              <a:rPr lang="en-US" sz="1400" b="0" i="0" dirty="0">
+                <a:effectLst/>
+              </a:rPr>
+              <a:t>) that stores data models (collections) on the user’s device. You can create, read, update, and delete (CRUD) data just like you would with online data sources, but everything happens locally.</a:t>
+            </a:r>
+          </a:p>
+          <a:p>
+            <a:pPr>
+              <a:spcBef>
+                <a:spcPct val="20000"/>
+              </a:spcBef>
+              <a:buFont typeface="Arial" pitchFamily="34" charset="0"/>
+            </a:pPr>
+            <a:endParaRPr lang="en-US" sz="1400" dirty="0"/>
+          </a:p>
+          <a:p>
+            <a:pPr>
+              <a:spcBef>
+                <a:spcPct val="20000"/>
+              </a:spcBef>
+              <a:buFont typeface="Arial" pitchFamily="34" charset="0"/>
+            </a:pPr>
+            <a:endParaRPr lang="en-US" sz="1400" dirty="0"/>
+          </a:p>
+        </p:txBody>
+      </p:sp>
+      <p:sp>
+        <p:nvSpPr>
+          <p:cNvPr id="9" name="TextBox 8">
+            <a:extLst>
+              <a:ext uri="{FF2B5EF4-FFF2-40B4-BE49-F238E27FC236}">
+                <a16:creationId xmlns:a16="http://schemas.microsoft.com/office/drawing/2014/main" id="{E27C46AF-43C3-8118-2493-FEDEBC8B05F7}"/>
+              </a:ext>
+            </a:extLst>
+          </p:cNvPr>
+          <p:cNvSpPr txBox="1"/>
+          <p:nvPr/>
+        </p:nvSpPr>
+        <p:spPr>
+          <a:xfrm>
+            <a:off x="228600" y="1610903"/>
+            <a:ext cx="8686800" cy="1569660"/>
+          </a:xfrm>
+          <a:prstGeom prst="rect">
+            <a:avLst/>
+          </a:prstGeom>
+          <a:noFill/>
+        </p:spPr>
+        <p:txBody>
+          <a:bodyPr wrap="square">
+            <a:spAutoFit/>
+          </a:bodyPr>
+          <a:lstStyle/>
+          <a:p>
+            <a:r>
+              <a:rPr lang="en-US" sz="1200" dirty="0"/>
+              <a:t>________________________________________</a:t>
+            </a:r>
+          </a:p>
+          <a:p>
+            <a:r>
+              <a:rPr lang="en-US" sz="1200" dirty="0"/>
+              <a:t>✅ Benefits:</a:t>
+            </a:r>
+          </a:p>
+          <a:p>
+            <a:r>
+              <a:rPr lang="en-US" sz="1200" dirty="0"/>
+              <a:t>•	Works without internet access.</a:t>
+            </a:r>
+          </a:p>
+          <a:p>
+            <a:r>
+              <a:rPr lang="en-US" sz="1200" dirty="0"/>
+              <a:t>•	Fast access to frequently used data.</a:t>
+            </a:r>
+          </a:p>
+          <a:p>
+            <a:r>
+              <a:rPr lang="en-US" sz="1200" dirty="0"/>
+              <a:t>•	Enables offline-first apps.</a:t>
+            </a:r>
+          </a:p>
+          <a:p>
+            <a:r>
+              <a:rPr lang="en-US" sz="1200" dirty="0"/>
+              <a:t>⚠️ Limitations:</a:t>
+            </a:r>
+          </a:p>
+          <a:p>
+            <a:r>
+              <a:rPr lang="en-US" sz="1200" dirty="0"/>
+              <a:t>•	No automatic sync — you must build custom sync logic.</a:t>
+            </a:r>
+          </a:p>
+          <a:p>
+            <a:r>
+              <a:rPr lang="en-US" sz="1200" dirty="0"/>
+              <a:t>•	Not ideal for real-time collaboration or large datasets unless properly optimized.</a:t>
+            </a:r>
+          </a:p>
+        </p:txBody>
+      </p:sp>
+      <p:pic>
+        <p:nvPicPr>
+          <p:cNvPr id="11" name="Picture 10" descr="A circular object with a check mark&#10;&#10;AI-generated content may be incorrect.">
+            <a:extLst>
+              <a:ext uri="{FF2B5EF4-FFF2-40B4-BE49-F238E27FC236}">
+                <a16:creationId xmlns:a16="http://schemas.microsoft.com/office/drawing/2014/main" id="{7A9CF5D3-6ECA-4E37-EF57-6A1FE7FEA703}"/>
+              </a:ext>
+            </a:extLst>
+          </p:cNvPr>
+          <p:cNvPicPr>
+            <a:picLocks noChangeAspect="1"/>
+          </p:cNvPicPr>
+          <p:nvPr/>
+        </p:nvPicPr>
+        <p:blipFill>
+          <a:blip r:embed="rId2" cstate="print">
+            <a:extLst>
+              <a:ext uri="{28A0092B-C50C-407E-A947-70E740481C1C}">
+                <a14:useLocalDpi xmlns:a14="http://schemas.microsoft.com/office/drawing/2010/main" val="0"/>
+              </a:ext>
+              <a:ext uri="{837473B0-CC2E-450A-ABE3-18F120FF3D39}">
+                <a1611:picAttrSrcUrl xmlns:a1611="http://schemas.microsoft.com/office/drawing/2016/11/main" r:id="rId3"/>
+              </a:ext>
+            </a:extLst>
+          </a:blip>
+          <a:stretch>
+            <a:fillRect/>
+          </a:stretch>
+        </p:blipFill>
+        <p:spPr>
+          <a:xfrm>
+            <a:off x="6858000" y="1610902"/>
+            <a:ext cx="1809750" cy="1809750"/>
+          </a:xfrm>
+          <a:prstGeom prst="rect">
+            <a:avLst/>
+          </a:prstGeom>
+        </p:spPr>
+      </p:pic>
+    </p:spTree>
+    <p:extLst>
+      <p:ext uri="{BB962C8B-B14F-4D97-AF65-F5344CB8AC3E}">
+        <p14:creationId xmlns:p14="http://schemas.microsoft.com/office/powerpoint/2010/main" val="276184113"/>
+      </p:ext>
+    </p:extLst>
+  </p:cSld>
+  <p:clrMapOvr>
+    <a:masterClrMapping/>
+  </p:clrMapOvr>
+  <mc:AlternateContent xmlns:mc="http://schemas.openxmlformats.org/markup-compatibility/2006" xmlns:p14="http://schemas.microsoft.com/office/powerpoint/2010/main">
+    <mc:Choice Requires="p14">
+      <p:transition spd="med" p14:dur="700">
+        <p:fade/>
+      </p:transition>
+    </mc:Choice>
+    <mc:Fallback xmlns="">
+      <p:transition spd="med">
+        <p:fade/>
+      </p:transition>
+    </mc:Fallback>
+  </mc:AlternateContent>
+</p:sld>
+</file>
+
+<file path=ppt/slides/slide8.xml><?xml version="1.0" encoding="utf-8"?>
+<p:sld xmlns:a="http://schemas.openxmlformats.org/drawingml/2006/main" xmlns:r="http://schemas.openxmlformats.org/officeDocument/2006/relationships" xmlns:p="http://schemas.openxmlformats.org/presentationml/2006/main">
+  <p:cSld>
+    <p:spTree>
+      <p:nvGrpSpPr>
+        <p:cNvPr id="1" name="">
+          <a:extLst>
+            <a:ext uri="{FF2B5EF4-FFF2-40B4-BE49-F238E27FC236}">
               <a16:creationId xmlns:a16="http://schemas.microsoft.com/office/drawing/2014/main" id="{0BAA8D8C-6325-97C6-EF85-E4D7708C44FC}"/>
             </a:ext>
           </a:extLst>
@@ -30357,7 +32544,7 @@
             <a:fld id="{B6F15528-21DE-4FAA-801E-634DDDAF4B2B}" type="slidenum">
               <a:rPr lang="en-US" smtClean="0"/>
               <a:pPr/>
-              <a:t>6</a:t>
+              <a:t>8</a:t>
             </a:fld>
             <a:endParaRPr lang="en-US" dirty="0"/>
           </a:p>
@@ -30618,7 +32805,7 @@
 </p:sld>
 </file>
 
-<file path=ppt/slides/slide7.xml><?xml version="1.0" encoding="utf-8"?>
+<file path=ppt/slides/slide9.xml><?xml version="1.0" encoding="utf-8"?>
 <p:sld xmlns:a="http://schemas.openxmlformats.org/drawingml/2006/main" xmlns:r="http://schemas.openxmlformats.org/officeDocument/2006/relationships" xmlns:p="http://schemas.openxmlformats.org/presentationml/2006/main">
   <p:cSld>
     <p:spTree>
@@ -30698,7 +32885,7 @@
             <a:fld id="{B6F15528-21DE-4FAA-801E-634DDDAF4B2B}" type="slidenum">
               <a:rPr lang="en-US" smtClean="0"/>
               <a:pPr/>
-              <a:t>7</a:t>
+              <a:t>9</a:t>
             </a:fld>
             <a:endParaRPr lang="en-US" dirty="0"/>
           </a:p>
@@ -30831,1165 +33018,6 @@
       </p:transition>
     </mc:Fallback>
   </mc:AlternateContent>
-</p:sld>
-</file>
-
-<file path=ppt/slides/slide8.xml><?xml version="1.0" encoding="utf-8"?>
-<p:sld xmlns:a="http://schemas.openxmlformats.org/drawingml/2006/main" xmlns:r="http://schemas.openxmlformats.org/officeDocument/2006/relationships" xmlns:p="http://schemas.openxmlformats.org/presentationml/2006/main">
-  <p:cSld>
-    <p:spTree>
-      <p:nvGrpSpPr>
-        <p:cNvPr id="1" name=""/>
-        <p:cNvGrpSpPr/>
-        <p:nvPr/>
-      </p:nvGrpSpPr>
-      <p:grpSpPr>
-        <a:xfrm>
-          <a:off x="0" y="0"/>
-          <a:ext cx="0" cy="0"/>
-          <a:chOff x="0" y="0"/>
-          <a:chExt cx="0" cy="0"/>
-        </a:xfrm>
-      </p:grpSpPr>
-      <p:sp>
-        <p:nvSpPr>
-          <p:cNvPr id="2" name="Footer Placeholder 1">
-            <a:extLst>
-              <a:ext uri="{FF2B5EF4-FFF2-40B4-BE49-F238E27FC236}">
-                <a16:creationId xmlns:a16="http://schemas.microsoft.com/office/drawing/2014/main" id="{515D2C93-0120-CCFC-9609-5065A85D5191}"/>
-              </a:ext>
-            </a:extLst>
-          </p:cNvPr>
-          <p:cNvSpPr>
-            <a:spLocks noGrp="1"/>
-          </p:cNvSpPr>
-          <p:nvPr>
-            <p:ph type="ftr" sz="quarter" idx="11"/>
-          </p:nvPr>
-        </p:nvSpPr>
-        <p:spPr/>
-        <p:txBody>
-          <a:bodyPr/>
-          <a:lstStyle/>
-          <a:p>
-            <a:r>
-              <a:rPr lang="en-US"/>
-              <a:t>www.anubhavtrainings.com</a:t>
-            </a:r>
-            <a:endParaRPr lang="en-US" dirty="0"/>
-          </a:p>
-        </p:txBody>
-      </p:sp>
-      <p:sp>
-        <p:nvSpPr>
-          <p:cNvPr id="3" name="Slide Number Placeholder 2">
-            <a:extLst>
-              <a:ext uri="{FF2B5EF4-FFF2-40B4-BE49-F238E27FC236}">
-                <a16:creationId xmlns:a16="http://schemas.microsoft.com/office/drawing/2014/main" id="{8C7B24C2-E0A7-CEBF-F7A8-383001851AF8}"/>
-              </a:ext>
-            </a:extLst>
-          </p:cNvPr>
-          <p:cNvSpPr>
-            <a:spLocks noGrp="1"/>
-          </p:cNvSpPr>
-          <p:nvPr>
-            <p:ph type="sldNum" sz="quarter" idx="12"/>
-          </p:nvPr>
-        </p:nvSpPr>
-        <p:spPr/>
-        <p:txBody>
-          <a:bodyPr/>
-          <a:lstStyle/>
-          <a:p>
-            <a:fld id="{B6F15528-21DE-4FAA-801E-634DDDAF4B2B}" type="slidenum">
-              <a:rPr lang="en-US" smtClean="0"/>
-              <a:pPr/>
-              <a:t>8</a:t>
-            </a:fld>
-            <a:endParaRPr lang="en-US"/>
-          </a:p>
-        </p:txBody>
-      </p:sp>
-      <p:sp>
-        <p:nvSpPr>
-          <p:cNvPr id="4" name="Title 3">
-            <a:extLst>
-              <a:ext uri="{FF2B5EF4-FFF2-40B4-BE49-F238E27FC236}">
-                <a16:creationId xmlns:a16="http://schemas.microsoft.com/office/drawing/2014/main" id="{3926B177-165E-9165-72C4-FD0C520A2E18}"/>
-              </a:ext>
-            </a:extLst>
-          </p:cNvPr>
-          <p:cNvSpPr>
-            <a:spLocks noGrp="1"/>
-          </p:cNvSpPr>
-          <p:nvPr>
-            <p:ph type="title"/>
-          </p:nvPr>
-        </p:nvSpPr>
-        <p:spPr/>
-        <p:txBody>
-          <a:bodyPr/>
-          <a:lstStyle/>
-          <a:p>
-            <a:endParaRPr lang="en-IN"/>
-          </a:p>
-        </p:txBody>
-      </p:sp>
-      <mc:AlternateContent xmlns:mc="http://schemas.openxmlformats.org/markup-compatibility/2006" xmlns:p14="http://schemas.microsoft.com/office/powerpoint/2010/main">
-        <mc:Choice Requires="p14">
-          <p:contentPart p14:bwMode="auto" r:id="rId2">
-            <p14:nvContentPartPr>
-              <p14:cNvPr id="5" name="Ink 4">
-                <a:extLst>
-                  <a:ext uri="{FF2B5EF4-FFF2-40B4-BE49-F238E27FC236}">
-                    <a16:creationId xmlns:a16="http://schemas.microsoft.com/office/drawing/2014/main" id="{AB080056-AF3B-2DD1-1233-CD37BCC6426B}"/>
-                  </a:ext>
-                </a:extLst>
-              </p14:cNvPr>
-              <p14:cNvContentPartPr/>
-              <p14:nvPr/>
-            </p14:nvContentPartPr>
-            <p14:xfrm>
-              <a:off x="1315357" y="-14658"/>
-              <a:ext cx="360" cy="360"/>
-            </p14:xfrm>
-          </p:contentPart>
-        </mc:Choice>
-        <mc:Fallback xmlns="">
-          <p:pic>
-            <p:nvPicPr>
-              <p:cNvPr id="5" name="Ink 4">
-                <a:extLst>
-                  <a:ext uri="{FF2B5EF4-FFF2-40B4-BE49-F238E27FC236}">
-                    <a16:creationId xmlns:a16="http://schemas.microsoft.com/office/drawing/2014/main" id="{AB080056-AF3B-2DD1-1233-CD37BCC6426B}"/>
-                  </a:ext>
-                </a:extLst>
-              </p:cNvPr>
-              <p:cNvPicPr/>
-              <p:nvPr/>
-            </p:nvPicPr>
-            <p:blipFill>
-              <a:blip r:embed="rId3"/>
-              <a:stretch>
-                <a:fillRect/>
-              </a:stretch>
-            </p:blipFill>
-            <p:spPr>
-              <a:xfrm>
-                <a:off x="1306357" y="-23658"/>
-                <a:ext cx="18000" cy="18000"/>
-              </a:xfrm>
-              <a:prstGeom prst="rect">
-                <a:avLst/>
-              </a:prstGeom>
-            </p:spPr>
-          </p:pic>
-        </mc:Fallback>
-      </mc:AlternateContent>
-    </p:spTree>
-    <p:extLst>
-      <p:ext uri="{BB962C8B-B14F-4D97-AF65-F5344CB8AC3E}">
-        <p14:creationId xmlns:p14="http://schemas.microsoft.com/office/powerpoint/2010/main" val="720877012"/>
-      </p:ext>
-    </p:extLst>
-  </p:cSld>
-  <p:clrMapOvr>
-    <a:masterClrMapping/>
-  </p:clrMapOvr>
-</p:sld>
-</file>
-
-<file path=ppt/slides/slide9.xml><?xml version="1.0" encoding="utf-8"?>
-<p:sld xmlns:a="http://schemas.openxmlformats.org/drawingml/2006/main" xmlns:r="http://schemas.openxmlformats.org/officeDocument/2006/relationships" xmlns:p="http://schemas.openxmlformats.org/presentationml/2006/main">
-  <p:cSld>
-    <p:spTree>
-      <p:nvGrpSpPr>
-        <p:cNvPr id="1" name=""/>
-        <p:cNvGrpSpPr/>
-        <p:nvPr/>
-      </p:nvGrpSpPr>
-      <p:grpSpPr>
-        <a:xfrm>
-          <a:off x="0" y="0"/>
-          <a:ext cx="0" cy="0"/>
-          <a:chOff x="0" y="0"/>
-          <a:chExt cx="0" cy="0"/>
-        </a:xfrm>
-      </p:grpSpPr>
-      <p:sp>
-        <p:nvSpPr>
-          <p:cNvPr id="5" name="Flowchart: Connector 4"/>
-          <p:cNvSpPr/>
-          <p:nvPr/>
-        </p:nvSpPr>
-        <p:spPr>
-          <a:xfrm>
-            <a:off x="4355976" y="21622"/>
-            <a:ext cx="4168026" cy="4101362"/>
-          </a:xfrm>
-          <a:prstGeom prst="flowChartConnector">
-            <a:avLst/>
-          </a:prstGeom>
-          <a:gradFill flip="none" rotWithShape="1">
-            <a:gsLst>
-              <a:gs pos="0">
-                <a:srgbClr val="55E96E"/>
-              </a:gs>
-              <a:gs pos="46000">
-                <a:srgbClr val="0AEC25"/>
-              </a:gs>
-              <a:gs pos="100000">
-                <a:srgbClr val="00B050"/>
-              </a:gs>
-            </a:gsLst>
-            <a:path path="circle">
-              <a:fillToRect l="50000" t="130000" r="50000" b="-30000"/>
-            </a:path>
-            <a:tileRect/>
-          </a:gradFill>
-          <a:ln>
-            <a:noFill/>
-          </a:ln>
-        </p:spPr>
-        <p:style>
-          <a:lnRef idx="2">
-            <a:schemeClr val="accent1">
-              <a:shade val="50000"/>
-            </a:schemeClr>
-          </a:lnRef>
-          <a:fillRef idx="1">
-            <a:schemeClr val="accent1"/>
-          </a:fillRef>
-          <a:effectRef idx="0">
-            <a:schemeClr val="accent1"/>
-          </a:effectRef>
-          <a:fontRef idx="minor">
-            <a:schemeClr val="lt1"/>
-          </a:fontRef>
-        </p:style>
-        <p:txBody>
-          <a:bodyPr rtlCol="0" anchor="ctr"/>
-          <a:lstStyle/>
-          <a:p>
-            <a:pPr algn="ctr"/>
-            <a:endParaRPr lang="en-US" sz="1350"/>
-          </a:p>
-        </p:txBody>
-      </p:sp>
-      <p:pic>
-        <p:nvPicPr>
-          <p:cNvPr id="6" name="Picture Placeholder 11">
-            <a:extLst>
-              <a:ext uri="{FF2B5EF4-FFF2-40B4-BE49-F238E27FC236}">
-                <a16:creationId xmlns:a16="http://schemas.microsoft.com/office/drawing/2014/main" id="{420F5850-2D59-4C25-ADFF-E9013C5A6AAE}"/>
-              </a:ext>
-            </a:extLst>
-          </p:cNvPr>
-          <p:cNvPicPr>
-            <a:picLocks noChangeAspect="1"/>
-          </p:cNvPicPr>
-          <p:nvPr/>
-        </p:nvPicPr>
-        <p:blipFill>
-          <a:blip r:embed="rId2">
-            <a:extLst>
-              <a:ext uri="{28A0092B-C50C-407E-A947-70E740481C1C}">
-                <a14:useLocalDpi xmlns:a14="http://schemas.microsoft.com/office/drawing/2010/main" val="0"/>
-              </a:ext>
-            </a:extLst>
-          </a:blip>
-          <a:stretch>
-            <a:fillRect/>
-          </a:stretch>
-        </p:blipFill>
-        <p:spPr>
-          <a:xfrm>
-            <a:off x="22649" y="10551"/>
-            <a:ext cx="5088657" cy="4690760"/>
-          </a:xfrm>
-          <a:custGeom>
-            <a:avLst/>
-            <a:gdLst>
-              <a:gd name="connsiteX0" fmla="*/ 0 w 7654699"/>
-              <a:gd name="connsiteY0" fmla="*/ 0 h 5678805"/>
-              <a:gd name="connsiteX1" fmla="*/ 7654699 w 7654699"/>
-              <a:gd name="connsiteY1" fmla="*/ 0 h 5678805"/>
-              <a:gd name="connsiteX2" fmla="*/ 7654699 w 7654699"/>
-              <a:gd name="connsiteY2" fmla="*/ 0 h 5678805"/>
-              <a:gd name="connsiteX3" fmla="*/ 7654699 w 7654699"/>
-              <a:gd name="connsiteY3" fmla="*/ 4808982 h 5678805"/>
-              <a:gd name="connsiteX4" fmla="*/ 6784876 w 7654699"/>
-              <a:gd name="connsiteY4" fmla="*/ 5678805 h 5678805"/>
-              <a:gd name="connsiteX5" fmla="*/ 869823 w 7654699"/>
-              <a:gd name="connsiteY5" fmla="*/ 5678805 h 5678805"/>
-              <a:gd name="connsiteX6" fmla="*/ 0 w 7654699"/>
-              <a:gd name="connsiteY6" fmla="*/ 4808982 h 5678805"/>
-              <a:gd name="connsiteX7" fmla="*/ 0 w 7654699"/>
-              <a:gd name="connsiteY7" fmla="*/ 0 h 5678805"/>
-              <a:gd name="connsiteX8" fmla="*/ 0 w 7654699"/>
-              <a:gd name="connsiteY8" fmla="*/ 0 h 5678805"/>
-              <a:gd name="connsiteX0" fmla="*/ 0 w 7654699"/>
-              <a:gd name="connsiteY0" fmla="*/ 6717 h 5685522"/>
-              <a:gd name="connsiteX1" fmla="*/ 901515 w 7654699"/>
-              <a:gd name="connsiteY1" fmla="*/ 0 h 5685522"/>
-              <a:gd name="connsiteX2" fmla="*/ 7654699 w 7654699"/>
-              <a:gd name="connsiteY2" fmla="*/ 6717 h 5685522"/>
-              <a:gd name="connsiteX3" fmla="*/ 7654699 w 7654699"/>
-              <a:gd name="connsiteY3" fmla="*/ 6717 h 5685522"/>
-              <a:gd name="connsiteX4" fmla="*/ 7654699 w 7654699"/>
-              <a:gd name="connsiteY4" fmla="*/ 4815699 h 5685522"/>
-              <a:gd name="connsiteX5" fmla="*/ 6784876 w 7654699"/>
-              <a:gd name="connsiteY5" fmla="*/ 5685522 h 5685522"/>
-              <a:gd name="connsiteX6" fmla="*/ 869823 w 7654699"/>
-              <a:gd name="connsiteY6" fmla="*/ 5685522 h 5685522"/>
-              <a:gd name="connsiteX7" fmla="*/ 0 w 7654699"/>
-              <a:gd name="connsiteY7" fmla="*/ 4815699 h 5685522"/>
-              <a:gd name="connsiteX8" fmla="*/ 0 w 7654699"/>
-              <a:gd name="connsiteY8" fmla="*/ 6717 h 5685522"/>
-              <a:gd name="connsiteX9" fmla="*/ 0 w 7654699"/>
-              <a:gd name="connsiteY9" fmla="*/ 6717 h 5685522"/>
-              <a:gd name="connsiteX0" fmla="*/ 0 w 7654699"/>
-              <a:gd name="connsiteY0" fmla="*/ 6717 h 5685522"/>
-              <a:gd name="connsiteX1" fmla="*/ 901515 w 7654699"/>
-              <a:gd name="connsiteY1" fmla="*/ 0 h 5685522"/>
-              <a:gd name="connsiteX2" fmla="*/ 7654699 w 7654699"/>
-              <a:gd name="connsiteY2" fmla="*/ 6717 h 5685522"/>
-              <a:gd name="connsiteX3" fmla="*/ 7654699 w 7654699"/>
-              <a:gd name="connsiteY3" fmla="*/ 6717 h 5685522"/>
-              <a:gd name="connsiteX4" fmla="*/ 7654699 w 7654699"/>
-              <a:gd name="connsiteY4" fmla="*/ 4815699 h 5685522"/>
-              <a:gd name="connsiteX5" fmla="*/ 6784876 w 7654699"/>
-              <a:gd name="connsiteY5" fmla="*/ 5685522 h 5685522"/>
-              <a:gd name="connsiteX6" fmla="*/ 869823 w 7654699"/>
-              <a:gd name="connsiteY6" fmla="*/ 5685522 h 5685522"/>
-              <a:gd name="connsiteX7" fmla="*/ 0 w 7654699"/>
-              <a:gd name="connsiteY7" fmla="*/ 4815699 h 5685522"/>
-              <a:gd name="connsiteX8" fmla="*/ 0 w 7654699"/>
-              <a:gd name="connsiteY8" fmla="*/ 6717 h 5685522"/>
-              <a:gd name="connsiteX0" fmla="*/ 0 w 7654699"/>
-              <a:gd name="connsiteY0" fmla="*/ 4815699 h 5685522"/>
-              <a:gd name="connsiteX1" fmla="*/ 901515 w 7654699"/>
-              <a:gd name="connsiteY1" fmla="*/ 0 h 5685522"/>
-              <a:gd name="connsiteX2" fmla="*/ 7654699 w 7654699"/>
-              <a:gd name="connsiteY2" fmla="*/ 6717 h 5685522"/>
-              <a:gd name="connsiteX3" fmla="*/ 7654699 w 7654699"/>
-              <a:gd name="connsiteY3" fmla="*/ 6717 h 5685522"/>
-              <a:gd name="connsiteX4" fmla="*/ 7654699 w 7654699"/>
-              <a:gd name="connsiteY4" fmla="*/ 4815699 h 5685522"/>
-              <a:gd name="connsiteX5" fmla="*/ 6784876 w 7654699"/>
-              <a:gd name="connsiteY5" fmla="*/ 5685522 h 5685522"/>
-              <a:gd name="connsiteX6" fmla="*/ 869823 w 7654699"/>
-              <a:gd name="connsiteY6" fmla="*/ 5685522 h 5685522"/>
-              <a:gd name="connsiteX7" fmla="*/ 0 w 7654699"/>
-              <a:gd name="connsiteY7" fmla="*/ 4815699 h 5685522"/>
-              <a:gd name="connsiteX0" fmla="*/ 776254 w 7561130"/>
-              <a:gd name="connsiteY0" fmla="*/ 5685522 h 5685522"/>
-              <a:gd name="connsiteX1" fmla="*/ 807946 w 7561130"/>
-              <a:gd name="connsiteY1" fmla="*/ 0 h 5685522"/>
-              <a:gd name="connsiteX2" fmla="*/ 7561130 w 7561130"/>
-              <a:gd name="connsiteY2" fmla="*/ 6717 h 5685522"/>
-              <a:gd name="connsiteX3" fmla="*/ 7561130 w 7561130"/>
-              <a:gd name="connsiteY3" fmla="*/ 6717 h 5685522"/>
-              <a:gd name="connsiteX4" fmla="*/ 7561130 w 7561130"/>
-              <a:gd name="connsiteY4" fmla="*/ 4815699 h 5685522"/>
-              <a:gd name="connsiteX5" fmla="*/ 6691307 w 7561130"/>
-              <a:gd name="connsiteY5" fmla="*/ 5685522 h 5685522"/>
-              <a:gd name="connsiteX6" fmla="*/ 776254 w 7561130"/>
-              <a:gd name="connsiteY6" fmla="*/ 5685522 h 5685522"/>
-              <a:gd name="connsiteX0" fmla="*/ 0 w 6784876"/>
-              <a:gd name="connsiteY0" fmla="*/ 5685522 h 5685522"/>
-              <a:gd name="connsiteX1" fmla="*/ 31692 w 6784876"/>
-              <a:gd name="connsiteY1" fmla="*/ 0 h 5685522"/>
-              <a:gd name="connsiteX2" fmla="*/ 6784876 w 6784876"/>
-              <a:gd name="connsiteY2" fmla="*/ 6717 h 5685522"/>
-              <a:gd name="connsiteX3" fmla="*/ 6784876 w 6784876"/>
-              <a:gd name="connsiteY3" fmla="*/ 6717 h 5685522"/>
-              <a:gd name="connsiteX4" fmla="*/ 6784876 w 6784876"/>
-              <a:gd name="connsiteY4" fmla="*/ 4815699 h 5685522"/>
-              <a:gd name="connsiteX5" fmla="*/ 5915053 w 6784876"/>
-              <a:gd name="connsiteY5" fmla="*/ 5685522 h 5685522"/>
-              <a:gd name="connsiteX6" fmla="*/ 0 w 6784876"/>
-              <a:gd name="connsiteY6" fmla="*/ 5685522 h 5685522"/>
-            </a:gdLst>
-            <a:ahLst/>
-            <a:cxnLst>
-              <a:cxn ang="0">
-                <a:pos x="connsiteX0" y="connsiteY0"/>
-              </a:cxn>
-              <a:cxn ang="0">
-                <a:pos x="connsiteX1" y="connsiteY1"/>
-              </a:cxn>
-              <a:cxn ang="0">
-                <a:pos x="connsiteX2" y="connsiteY2"/>
-              </a:cxn>
-              <a:cxn ang="0">
-                <a:pos x="connsiteX3" y="connsiteY3"/>
-              </a:cxn>
-              <a:cxn ang="0">
-                <a:pos x="connsiteX4" y="connsiteY4"/>
-              </a:cxn>
-              <a:cxn ang="0">
-                <a:pos x="connsiteX5" y="connsiteY5"/>
-              </a:cxn>
-              <a:cxn ang="0">
-                <a:pos x="connsiteX6" y="connsiteY6"/>
-              </a:cxn>
-            </a:cxnLst>
-            <a:rect l="l" t="t" r="r" b="b"/>
-            <a:pathLst>
-              <a:path w="6784876" h="5685522">
-                <a:moveTo>
-                  <a:pt x="0" y="5685522"/>
-                </a:moveTo>
-                <a:lnTo>
-                  <a:pt x="31692" y="0"/>
-                </a:lnTo>
-                <a:lnTo>
-                  <a:pt x="6784876" y="6717"/>
-                </a:lnTo>
-                <a:lnTo>
-                  <a:pt x="6784876" y="6717"/>
-                </a:lnTo>
-                <a:lnTo>
-                  <a:pt x="6784876" y="4815699"/>
-                </a:lnTo>
-                <a:cubicBezTo>
-                  <a:pt x="6784876" y="5296089"/>
-                  <a:pt x="6395443" y="5685522"/>
-                  <a:pt x="5915053" y="5685522"/>
-                </a:cubicBezTo>
-                <a:lnTo>
-                  <a:pt x="0" y="5685522"/>
-                </a:lnTo>
-                <a:close/>
-              </a:path>
-            </a:pathLst>
-          </a:custGeom>
-        </p:spPr>
-      </p:pic>
-      <p:sp>
-        <p:nvSpPr>
-          <p:cNvPr id="7" name="Rectangle: Rounded Corners 3">
-            <a:extLst>
-              <a:ext uri="{FF2B5EF4-FFF2-40B4-BE49-F238E27FC236}">
-                <a16:creationId xmlns:a16="http://schemas.microsoft.com/office/drawing/2014/main" id="{4DCA9A03-C201-42B6-AF8D-AB31333C8852}"/>
-              </a:ext>
-            </a:extLst>
-          </p:cNvPr>
-          <p:cNvSpPr/>
-          <p:nvPr/>
-        </p:nvSpPr>
-        <p:spPr>
-          <a:xfrm>
-            <a:off x="4550245" y="735546"/>
-            <a:ext cx="3973757" cy="2082201"/>
-          </a:xfrm>
-          <a:prstGeom prst="roundRect">
-            <a:avLst>
-              <a:gd name="adj" fmla="val 8835"/>
-            </a:avLst>
-          </a:prstGeom>
-          <a:solidFill>
-            <a:schemeClr val="bg1"/>
-          </a:solidFill>
-          <a:ln>
-            <a:noFill/>
-          </a:ln>
-          <a:effectLst>
-            <a:outerShdw blurRad="635000" dist="825500" dir="9600000" algn="tr" rotWithShape="0">
-              <a:prstClr val="black">
-                <a:alpha val="20000"/>
-              </a:prstClr>
-            </a:outerShdw>
-          </a:effectLst>
-        </p:spPr>
-        <p:style>
-          <a:lnRef idx="2">
-            <a:schemeClr val="accent1">
-              <a:shade val="50000"/>
-            </a:schemeClr>
-          </a:lnRef>
-          <a:fillRef idx="1">
-            <a:schemeClr val="accent1"/>
-          </a:fillRef>
-          <a:effectRef idx="0">
-            <a:schemeClr val="accent1"/>
-          </a:effectRef>
-          <a:fontRef idx="minor">
-            <a:schemeClr val="lt1"/>
-          </a:fontRef>
-        </p:style>
-        <p:txBody>
-          <a:bodyPr rtlCol="0" anchor="ctr"/>
-          <a:lstStyle/>
-          <a:p>
-            <a:pPr algn="ctr"/>
-            <a:endParaRPr lang="en-IN" sz="1350" dirty="0"/>
-          </a:p>
-        </p:txBody>
-      </p:sp>
-      <p:sp>
-        <p:nvSpPr>
-          <p:cNvPr id="8" name="TextBox 7">
-            <a:extLst>
-              <a:ext uri="{FF2B5EF4-FFF2-40B4-BE49-F238E27FC236}">
-                <a16:creationId xmlns:a16="http://schemas.microsoft.com/office/drawing/2014/main" id="{4B09D3EC-7881-4341-8189-469046CA259E}"/>
-              </a:ext>
-            </a:extLst>
-          </p:cNvPr>
-          <p:cNvSpPr txBox="1"/>
-          <p:nvPr/>
-        </p:nvSpPr>
-        <p:spPr>
-          <a:xfrm>
-            <a:off x="4981951" y="1042138"/>
-            <a:ext cx="3179963" cy="461665"/>
-          </a:xfrm>
-          <a:prstGeom prst="rect">
-            <a:avLst/>
-          </a:prstGeom>
-          <a:noFill/>
-        </p:spPr>
-        <p:txBody>
-          <a:bodyPr wrap="square" lIns="0" tIns="0" rIns="0" bIns="0" rtlCol="0">
-            <a:spAutoFit/>
-          </a:bodyPr>
-          <a:lstStyle/>
-          <a:p>
-            <a:r>
-              <a:rPr lang="en-IN" sz="3000" b="1" dirty="0">
-                <a:solidFill>
-                  <a:srgbClr val="75C042"/>
-                </a:solidFill>
-              </a:rPr>
-              <a:t>What We </a:t>
-            </a:r>
-            <a:r>
-              <a:rPr lang="en-IN" sz="3000" b="1" dirty="0">
-                <a:solidFill>
-                  <a:srgbClr val="55E96E"/>
-                </a:solidFill>
-                <a:latin typeface="Segoe UI Light" panose="020B0502040204020203" pitchFamily="34" charset="0"/>
-                <a:cs typeface="Segoe UI Light" panose="020B0502040204020203" pitchFamily="34" charset="0"/>
-              </a:rPr>
-              <a:t>Did</a:t>
-            </a:r>
-          </a:p>
-        </p:txBody>
-      </p:sp>
-      <p:sp>
-        <p:nvSpPr>
-          <p:cNvPr id="9" name="TextBox 8">
-            <a:extLst>
-              <a:ext uri="{FF2B5EF4-FFF2-40B4-BE49-F238E27FC236}">
-                <a16:creationId xmlns:a16="http://schemas.microsoft.com/office/drawing/2014/main" id="{A0CBE2D0-9475-4BE8-AC62-B9A03DC275C3}"/>
-              </a:ext>
-            </a:extLst>
-          </p:cNvPr>
-          <p:cNvSpPr txBox="1"/>
-          <p:nvPr/>
-        </p:nvSpPr>
-        <p:spPr>
-          <a:xfrm>
-            <a:off x="4981951" y="1610639"/>
-            <a:ext cx="3179963" cy="461665"/>
-          </a:xfrm>
-          <a:prstGeom prst="rect">
-            <a:avLst/>
-          </a:prstGeom>
-          <a:noFill/>
-        </p:spPr>
-        <p:txBody>
-          <a:bodyPr wrap="square" lIns="0" tIns="0" rIns="0" bIns="0" rtlCol="0" anchor="t">
-            <a:spAutoFit/>
-          </a:bodyPr>
-          <a:lstStyle/>
-          <a:p>
-            <a:r>
-              <a:rPr lang="en-US" sz="3000" kern="0" dirty="0">
-                <a:solidFill>
-                  <a:schemeClr val="tx1">
-                    <a:lumMod val="75000"/>
-                    <a:lumOff val="25000"/>
-                  </a:schemeClr>
-                </a:solidFill>
-                <a:latin typeface="Segoe UI" panose="020B0502040204020203" pitchFamily="34" charset="0"/>
-                <a:ea typeface="Calibri Light" charset="0"/>
-                <a:cs typeface="Segoe UI" panose="020B0502040204020203" pitchFamily="34" charset="0"/>
-              </a:rPr>
-              <a:t>Let’s Summarize</a:t>
-            </a:r>
-            <a:endParaRPr lang="en-US" sz="3000" dirty="0">
-              <a:solidFill>
-                <a:schemeClr val="tx1">
-                  <a:lumMod val="75000"/>
-                  <a:lumOff val="25000"/>
-                </a:schemeClr>
-              </a:solidFill>
-              <a:latin typeface="Segoe UI" panose="020B0502040204020203" pitchFamily="34" charset="0"/>
-              <a:ea typeface="Calibri Light" charset="0"/>
-              <a:cs typeface="Segoe UI" panose="020B0502040204020203" pitchFamily="34" charset="0"/>
-            </a:endParaRPr>
-          </a:p>
-        </p:txBody>
-      </p:sp>
-      <p:grpSp>
-        <p:nvGrpSpPr>
-          <p:cNvPr id="10" name="Group 9">
-            <a:extLst>
-              <a:ext uri="{FF2B5EF4-FFF2-40B4-BE49-F238E27FC236}">
-                <a16:creationId xmlns:a16="http://schemas.microsoft.com/office/drawing/2014/main" id="{CBADDFA3-0336-41F5-81AE-B9456B828C2C}"/>
-              </a:ext>
-            </a:extLst>
-          </p:cNvPr>
-          <p:cNvGrpSpPr/>
-          <p:nvPr/>
-        </p:nvGrpSpPr>
-        <p:grpSpPr>
-          <a:xfrm>
-            <a:off x="4999393" y="2370854"/>
-            <a:ext cx="463016" cy="82493"/>
-            <a:chOff x="6006451" y="5603130"/>
-            <a:chExt cx="617354" cy="109990"/>
-          </a:xfrm>
-        </p:grpSpPr>
-        <p:sp>
-          <p:nvSpPr>
-            <p:cNvPr id="11" name="Rectangle 5">
-              <a:extLst>
-                <a:ext uri="{FF2B5EF4-FFF2-40B4-BE49-F238E27FC236}">
-                  <a16:creationId xmlns:a16="http://schemas.microsoft.com/office/drawing/2014/main" id="{EF42471A-33F9-4E04-8306-66A59FCEE04D}"/>
-                </a:ext>
-              </a:extLst>
-            </p:cNvPr>
-            <p:cNvSpPr>
-              <a:spLocks noChangeArrowheads="1"/>
-            </p:cNvSpPr>
-            <p:nvPr/>
-          </p:nvSpPr>
-          <p:spPr bwMode="auto">
-            <a:xfrm>
-              <a:off x="6006451" y="5603130"/>
-              <a:ext cx="109992" cy="109990"/>
-            </a:xfrm>
-            <a:prstGeom prst="rect">
-              <a:avLst/>
-            </a:prstGeom>
-            <a:solidFill>
-              <a:srgbClr val="00B050"/>
-            </a:solidFill>
-            <a:ln w="9525">
-              <a:noFill/>
-              <a:miter lim="800000"/>
-              <a:headEnd/>
-              <a:tailEnd/>
-            </a:ln>
-          </p:spPr>
-          <p:txBody>
-            <a:bodyPr vert="horz" wrap="square" lIns="68580" tIns="34290" rIns="68580" bIns="34290" numCol="1" anchor="t" anchorCtr="0" compatLnSpc="1">
-              <a:prstTxWarp prst="textNoShape">
-                <a:avLst/>
-              </a:prstTxWarp>
-            </a:bodyPr>
-            <a:lstStyle/>
-            <a:p>
-              <a:endParaRPr lang="en-IN" sz="1350"/>
-            </a:p>
-          </p:txBody>
-        </p:sp>
-        <p:sp>
-          <p:nvSpPr>
-            <p:cNvPr id="12" name="Rectangle 5">
-              <a:extLst>
-                <a:ext uri="{FF2B5EF4-FFF2-40B4-BE49-F238E27FC236}">
-                  <a16:creationId xmlns:a16="http://schemas.microsoft.com/office/drawing/2014/main" id="{C99CB4F6-0149-49F4-8A24-BEB708A29F1A}"/>
-                </a:ext>
-              </a:extLst>
-            </p:cNvPr>
-            <p:cNvSpPr>
-              <a:spLocks noChangeArrowheads="1"/>
-            </p:cNvSpPr>
-            <p:nvPr/>
-          </p:nvSpPr>
-          <p:spPr bwMode="auto">
-            <a:xfrm>
-              <a:off x="6260132" y="5603130"/>
-              <a:ext cx="109992" cy="109990"/>
-            </a:xfrm>
-            <a:prstGeom prst="rect">
-              <a:avLst/>
-            </a:prstGeom>
-            <a:solidFill>
-              <a:srgbClr val="75C042"/>
-            </a:solidFill>
-            <a:ln w="9525">
-              <a:noFill/>
-              <a:miter lim="800000"/>
-              <a:headEnd/>
-              <a:tailEnd/>
-            </a:ln>
-          </p:spPr>
-          <p:txBody>
-            <a:bodyPr vert="horz" wrap="square" lIns="68580" tIns="34290" rIns="68580" bIns="34290" numCol="1" anchor="t" anchorCtr="0" compatLnSpc="1">
-              <a:prstTxWarp prst="textNoShape">
-                <a:avLst/>
-              </a:prstTxWarp>
-            </a:bodyPr>
-            <a:lstStyle/>
-            <a:p>
-              <a:endParaRPr lang="en-IN" sz="1350"/>
-            </a:p>
-          </p:txBody>
-        </p:sp>
-        <p:sp>
-          <p:nvSpPr>
-            <p:cNvPr id="13" name="Rectangle 5">
-              <a:extLst>
-                <a:ext uri="{FF2B5EF4-FFF2-40B4-BE49-F238E27FC236}">
-                  <a16:creationId xmlns:a16="http://schemas.microsoft.com/office/drawing/2014/main" id="{8BED369E-8B8A-45FD-8B5A-703CE09C2946}"/>
-                </a:ext>
-              </a:extLst>
-            </p:cNvPr>
-            <p:cNvSpPr>
-              <a:spLocks noChangeArrowheads="1"/>
-            </p:cNvSpPr>
-            <p:nvPr/>
-          </p:nvSpPr>
-          <p:spPr bwMode="auto">
-            <a:xfrm>
-              <a:off x="6513813" y="5603130"/>
-              <a:ext cx="109992" cy="109990"/>
-            </a:xfrm>
-            <a:prstGeom prst="rect">
-              <a:avLst/>
-            </a:prstGeom>
-            <a:solidFill>
-              <a:srgbClr val="0AEC25"/>
-            </a:solidFill>
-            <a:ln w="9525">
-              <a:noFill/>
-              <a:miter lim="800000"/>
-              <a:headEnd/>
-              <a:tailEnd/>
-            </a:ln>
-          </p:spPr>
-          <p:txBody>
-            <a:bodyPr vert="horz" wrap="square" lIns="68580" tIns="34290" rIns="68580" bIns="34290" numCol="1" anchor="t" anchorCtr="0" compatLnSpc="1">
-              <a:prstTxWarp prst="textNoShape">
-                <a:avLst/>
-              </a:prstTxWarp>
-            </a:bodyPr>
-            <a:lstStyle/>
-            <a:p>
-              <a:endParaRPr lang="en-IN" sz="1350"/>
-            </a:p>
-          </p:txBody>
-        </p:sp>
-      </p:grpSp>
-      <p:sp>
-        <p:nvSpPr>
-          <p:cNvPr id="14" name="Google Shape;845;p16"/>
-          <p:cNvSpPr/>
-          <p:nvPr/>
-        </p:nvSpPr>
-        <p:spPr>
-          <a:xfrm>
-            <a:off x="1190" y="0"/>
-            <a:ext cx="1494765" cy="736929"/>
-          </a:xfrm>
-          <a:custGeom>
-            <a:avLst/>
-            <a:gdLst/>
-            <a:ahLst/>
-            <a:cxnLst/>
-            <a:rect l="l" t="t" r="r" b="b"/>
-            <a:pathLst>
-              <a:path w="1993020" h="1803466" extrusionOk="0">
-                <a:moveTo>
-                  <a:pt x="0" y="0"/>
-                </a:moveTo>
-                <a:lnTo>
-                  <a:pt x="1993020" y="0"/>
-                </a:lnTo>
-                <a:lnTo>
-                  <a:pt x="1229306" y="1803466"/>
-                </a:lnTo>
-                <a:lnTo>
-                  <a:pt x="0" y="1803466"/>
-                </a:lnTo>
-                <a:lnTo>
-                  <a:pt x="0" y="0"/>
-                </a:lnTo>
-                <a:close/>
-              </a:path>
-            </a:pathLst>
-          </a:custGeom>
-          <a:solidFill>
-            <a:srgbClr val="75C042"/>
-          </a:solidFill>
-          <a:ln>
-            <a:noFill/>
-          </a:ln>
-        </p:spPr>
-        <p:txBody>
-          <a:bodyPr spcFirstLastPara="1" wrap="square" lIns="68569" tIns="34275" rIns="68569" bIns="34275" anchor="ctr" anchorCtr="0">
-            <a:noAutofit/>
-          </a:bodyPr>
-          <a:lstStyle/>
-          <a:p>
-            <a:pPr algn="ctr" defTabSz="685800">
-              <a:buClr>
-                <a:srgbClr val="000000"/>
-              </a:buClr>
-              <a:defRPr/>
-            </a:pPr>
-            <a:endParaRPr sz="1350" kern="0">
-              <a:solidFill>
-                <a:srgbClr val="75C042"/>
-              </a:solidFill>
-              <a:latin typeface="Calibri"/>
-              <a:ea typeface="Calibri"/>
-              <a:cs typeface="Calibri"/>
-              <a:sym typeface="Calibri"/>
-            </a:endParaRPr>
-          </a:p>
-        </p:txBody>
-      </p:sp>
-      <p:sp>
-        <p:nvSpPr>
-          <p:cNvPr id="16" name="Google Shape;552;p2"/>
-          <p:cNvSpPr txBox="1"/>
-          <p:nvPr/>
-        </p:nvSpPr>
-        <p:spPr>
-          <a:xfrm>
-            <a:off x="7108178" y="4873864"/>
-            <a:ext cx="2251926" cy="253885"/>
-          </a:xfrm>
-          <a:prstGeom prst="rect">
-            <a:avLst/>
-          </a:prstGeom>
-          <a:noFill/>
-          <a:ln>
-            <a:noFill/>
-          </a:ln>
-        </p:spPr>
-        <p:txBody>
-          <a:bodyPr spcFirstLastPara="1" wrap="square" lIns="68569" tIns="34275" rIns="68569" bIns="34275" anchor="t" anchorCtr="0">
-            <a:spAutoFit/>
-          </a:bodyPr>
-          <a:lstStyle/>
-          <a:p>
-            <a:r>
-              <a:rPr lang="en-US" sz="1200" dirty="0">
-                <a:solidFill>
-                  <a:srgbClr val="75C042"/>
-                </a:solidFill>
-                <a:latin typeface="Cambria" panose="02040503050406030204" pitchFamily="18" charset="0"/>
-                <a:ea typeface="Cambria" panose="02040503050406030204" pitchFamily="18" charset="0"/>
-                <a:cs typeface="Corben"/>
-                <a:sym typeface="Corben"/>
-              </a:rPr>
-              <a:t>www.anubhavtrainings.com</a:t>
-            </a:r>
-            <a:endParaRPr sz="1200" dirty="0">
-              <a:solidFill>
-                <a:srgbClr val="75C042"/>
-              </a:solidFill>
-              <a:latin typeface="Cambria" panose="02040503050406030204" pitchFamily="18" charset="0"/>
-              <a:ea typeface="Cambria" panose="02040503050406030204" pitchFamily="18" charset="0"/>
-              <a:cs typeface="Corben"/>
-              <a:sym typeface="Corben"/>
-            </a:endParaRPr>
-          </a:p>
-        </p:txBody>
-      </p:sp>
-      <p:pic>
-        <p:nvPicPr>
-          <p:cNvPr id="17" name="Picture 4">
-            <a:extLst>
-              <a:ext uri="{FF2B5EF4-FFF2-40B4-BE49-F238E27FC236}">
-                <a16:creationId xmlns:a16="http://schemas.microsoft.com/office/drawing/2014/main" id="{DB8A7F7E-7F2C-20C1-2A09-7D9F11F6AD11}"/>
-              </a:ext>
-            </a:extLst>
-          </p:cNvPr>
-          <p:cNvPicPr>
-            <a:picLocks noChangeAspect="1" noChangeArrowheads="1"/>
-          </p:cNvPicPr>
-          <p:nvPr/>
-        </p:nvPicPr>
-        <p:blipFill>
-          <a:blip r:embed="rId3" cstate="print">
-            <a:extLst>
-              <a:ext uri="{28A0092B-C50C-407E-A947-70E740481C1C}">
-                <a14:useLocalDpi xmlns:a14="http://schemas.microsoft.com/office/drawing/2010/main" val="0"/>
-              </a:ext>
-            </a:extLst>
-          </a:blip>
-          <a:srcRect/>
-          <a:stretch>
-            <a:fillRect/>
-          </a:stretch>
-        </p:blipFill>
-        <p:spPr bwMode="auto">
-          <a:xfrm>
-            <a:off x="8650243" y="0"/>
-            <a:ext cx="491377" cy="485336"/>
-          </a:xfrm>
-          <a:prstGeom prst="rect">
-            <a:avLst/>
-          </a:prstGeom>
-          <a:noFill/>
-          <a:extLst>
-            <a:ext uri="{909E8E84-426E-40DD-AFC4-6F175D3DCCD1}">
-              <a14:hiddenFill xmlns:a14="http://schemas.microsoft.com/office/drawing/2010/main">
-                <a:solidFill>
-                  <a:srgbClr val="FFFFFF"/>
-                </a:solidFill>
-              </a14:hiddenFill>
-            </a:ext>
-          </a:extLst>
-        </p:spPr>
-      </p:pic>
-    </p:spTree>
-    <p:extLst>
-      <p:ext uri="{BB962C8B-B14F-4D97-AF65-F5344CB8AC3E}">
-        <p14:creationId xmlns:p14="http://schemas.microsoft.com/office/powerpoint/2010/main" val="2376139371"/>
-      </p:ext>
-    </p:extLst>
-  </p:cSld>
-  <p:clrMapOvr>
-    <a:masterClrMapping/>
-  </p:clrMapOvr>
-  <p:timing>
-    <p:tnLst>
-      <p:par>
-        <p:cTn id="1" dur="indefinite" restart="never" nodeType="tmRoot">
-          <p:childTnLst>
-            <p:seq concurrent="1" nextAc="seek">
-              <p:cTn id="2" dur="indefinite" nodeType="mainSeq">
-                <p:childTnLst>
-                  <p:par>
-                    <p:cTn id="3" fill="hold">
-                      <p:stCondLst>
-                        <p:cond delay="indefinite"/>
-                      </p:stCondLst>
-                      <p:childTnLst>
-                        <p:par>
-                          <p:cTn id="4" fill="hold">
-                            <p:stCondLst>
-                              <p:cond delay="0"/>
-                            </p:stCondLst>
-                            <p:childTnLst>
-                              <p:par>
-                                <p:cTn id="5" presetID="16" presetClass="entr" presetSubtype="21" fill="hold" grpId="0" nodeType="clickEffect">
-                                  <p:stCondLst>
-                                    <p:cond delay="0"/>
-                                  </p:stCondLst>
-                                  <p:childTnLst>
-                                    <p:set>
-                                      <p:cBhvr>
-                                        <p:cTn id="6" dur="1" fill="hold">
-                                          <p:stCondLst>
-                                            <p:cond delay="0"/>
-                                          </p:stCondLst>
-                                        </p:cTn>
-                                        <p:tgtEl>
-                                          <p:spTgt spid="8"/>
-                                        </p:tgtEl>
-                                        <p:attrNameLst>
-                                          <p:attrName>style.visibility</p:attrName>
-                                        </p:attrNameLst>
-                                      </p:cBhvr>
-                                      <p:to>
-                                        <p:strVal val="visible"/>
-                                      </p:to>
-                                    </p:set>
-                                    <p:animEffect transition="in" filter="barn(inVertical)">
-                                      <p:cBhvr>
-                                        <p:cTn id="7" dur="500"/>
-                                        <p:tgtEl>
-                                          <p:spTgt spid="8"/>
-                                        </p:tgtEl>
-                                      </p:cBhvr>
-                                    </p:animEffect>
-                                  </p:childTnLst>
-                                </p:cTn>
-                              </p:par>
-                              <p:par>
-                                <p:cTn id="8" presetID="16" presetClass="entr" presetSubtype="21" fill="hold" grpId="0" nodeType="withEffect">
-                                  <p:stCondLst>
-                                    <p:cond delay="0"/>
-                                  </p:stCondLst>
-                                  <p:childTnLst>
-                                    <p:set>
-                                      <p:cBhvr>
-                                        <p:cTn id="9" dur="1" fill="hold">
-                                          <p:stCondLst>
-                                            <p:cond delay="0"/>
-                                          </p:stCondLst>
-                                        </p:cTn>
-                                        <p:tgtEl>
-                                          <p:spTgt spid="9"/>
-                                        </p:tgtEl>
-                                        <p:attrNameLst>
-                                          <p:attrName>style.visibility</p:attrName>
-                                        </p:attrNameLst>
-                                      </p:cBhvr>
-                                      <p:to>
-                                        <p:strVal val="visible"/>
-                                      </p:to>
-                                    </p:set>
-                                    <p:animEffect transition="in" filter="barn(inVertical)">
-                                      <p:cBhvr>
-                                        <p:cTn id="10" dur="500"/>
-                                        <p:tgtEl>
-                                          <p:spTgt spid="9"/>
-                                        </p:tgtEl>
-                                      </p:cBhvr>
-                                    </p:animEffect>
-                                  </p:childTnLst>
-                                </p:cTn>
-                              </p:par>
-                              <p:par>
-                                <p:cTn id="11" presetID="16" presetClass="entr" presetSubtype="21" fill="hold" nodeType="withEffect">
-                                  <p:stCondLst>
-                                    <p:cond delay="0"/>
-                                  </p:stCondLst>
-                                  <p:childTnLst>
-                                    <p:set>
-                                      <p:cBhvr>
-                                        <p:cTn id="12" dur="1" fill="hold">
-                                          <p:stCondLst>
-                                            <p:cond delay="0"/>
-                                          </p:stCondLst>
-                                        </p:cTn>
-                                        <p:tgtEl>
-                                          <p:spTgt spid="10"/>
-                                        </p:tgtEl>
-                                        <p:attrNameLst>
-                                          <p:attrName>style.visibility</p:attrName>
-                                        </p:attrNameLst>
-                                      </p:cBhvr>
-                                      <p:to>
-                                        <p:strVal val="visible"/>
-                                      </p:to>
-                                    </p:set>
-                                    <p:animEffect transition="in" filter="barn(inVertical)">
-                                      <p:cBhvr>
-                                        <p:cTn id="13" dur="500"/>
-                                        <p:tgtEl>
-                                          <p:spTgt spid="10"/>
-                                        </p:tgtEl>
-                                      </p:cBhvr>
-                                    </p:animEffect>
-                                  </p:childTnLst>
-                                </p:cTn>
-                              </p:par>
-                              <p:par>
-                                <p:cTn id="14" presetID="16" presetClass="entr" presetSubtype="21" fill="hold" grpId="0" nodeType="withEffect">
-                                  <p:stCondLst>
-                                    <p:cond delay="0"/>
-                                  </p:stCondLst>
-                                  <p:childTnLst>
-                                    <p:set>
-                                      <p:cBhvr>
-                                        <p:cTn id="15" dur="1" fill="hold">
-                                          <p:stCondLst>
-                                            <p:cond delay="0"/>
-                                          </p:stCondLst>
-                                        </p:cTn>
-                                        <p:tgtEl>
-                                          <p:spTgt spid="7"/>
-                                        </p:tgtEl>
-                                        <p:attrNameLst>
-                                          <p:attrName>style.visibility</p:attrName>
-                                        </p:attrNameLst>
-                                      </p:cBhvr>
-                                      <p:to>
-                                        <p:strVal val="visible"/>
-                                      </p:to>
-                                    </p:set>
-                                    <p:animEffect transition="in" filter="barn(inVertical)">
-                                      <p:cBhvr>
-                                        <p:cTn id="16" dur="500"/>
-                                        <p:tgtEl>
-                                          <p:spTgt spid="7"/>
-                                        </p:tgtEl>
-                                      </p:cBhvr>
-                                    </p:animEffect>
-                                  </p:childTnLst>
-                                </p:cTn>
-                              </p:par>
-                              <p:par>
-                                <p:cTn id="17" presetID="16" presetClass="entr" presetSubtype="21" fill="hold" grpId="0" nodeType="withEffect">
-                                  <p:stCondLst>
-                                    <p:cond delay="0"/>
-                                  </p:stCondLst>
-                                  <p:childTnLst>
-                                    <p:set>
-                                      <p:cBhvr>
-                                        <p:cTn id="18" dur="1" fill="hold">
-                                          <p:stCondLst>
-                                            <p:cond delay="0"/>
-                                          </p:stCondLst>
-                                        </p:cTn>
-                                        <p:tgtEl>
-                                          <p:spTgt spid="5"/>
-                                        </p:tgtEl>
-                                        <p:attrNameLst>
-                                          <p:attrName>style.visibility</p:attrName>
-                                        </p:attrNameLst>
-                                      </p:cBhvr>
-                                      <p:to>
-                                        <p:strVal val="visible"/>
-                                      </p:to>
-                                    </p:set>
-                                    <p:animEffect transition="in" filter="barn(inVertical)">
-                                      <p:cBhvr>
-                                        <p:cTn id="19" dur="500"/>
-                                        <p:tgtEl>
-                                          <p:spTgt spid="5"/>
-                                        </p:tgtEl>
-                                      </p:cBhvr>
-                                    </p:animEffect>
-                                  </p:childTnLst>
-                                </p:cTn>
-                              </p:par>
-                            </p:childTnLst>
-                          </p:cTn>
-                        </p:par>
-                      </p:childTnLst>
-                    </p:cTn>
-                  </p:par>
-                </p:childTnLst>
-              </p:cTn>
-              <p:prevCondLst>
-                <p:cond evt="onPrev" delay="0">
-                  <p:tgtEl>
-                    <p:sldTgt/>
-                  </p:tgtEl>
-                </p:cond>
-              </p:prevCondLst>
-              <p:nextCondLst>
-                <p:cond evt="onNext" delay="0">
-                  <p:tgtEl>
-                    <p:sldTgt/>
-                  </p:tgtEl>
-                </p:cond>
-              </p:nextCondLst>
-            </p:seq>
-          </p:childTnLst>
-        </p:cTn>
-      </p:par>
-    </p:tnLst>
-    <p:bldLst>
-      <p:bldP spid="5" grpId="0" animBg="1"/>
-      <p:bldP spid="7" grpId="0" animBg="1"/>
-      <p:bldP spid="8" grpId="0"/>
-      <p:bldP spid="9" grpId="0"/>
-    </p:bldLst>
-  </p:timing>
 </p:sld>
 </file>
 
